--- a/ppts/european_ivd_market_analysis.pptx
+++ b/ppts/european_ivd_market_analysis.pptx
@@ -3118,7 +3118,7 @@
           <a:lstStyle/>
           <a:p>
             <a:r>
-              <a:t>European IVD Market Analysis: Chinese Supplier Expansion</a:t>
+              <a:t>European IVD Market Entry Strategy</a:t>
             </a:r>
           </a:p>
         </p:txBody>
@@ -3139,12 +3139,12 @@
           <a:lstStyle/>
           <a:p>
             <a:r>
-              <a:t>Strategic Research Presentation</a:t>
-            </a:r>
-          </a:p>
-          <a:p>
-            <a:r>
-              <a:t>Client Confidential</a:t>
+              <a:t>Strategic Insights for Chinese Diagnostic Companies</a:t>
+            </a:r>
+          </a:p>
+          <a:p>
+            <a:r>
+              <a:t>Comprehensive Market Analysis &amp; Regulatory Landscape</a:t>
             </a:r>
           </a:p>
         </p:txBody>
@@ -3183,7 +3183,7 @@
           <a:lstStyle/>
           <a:p>
             <a:r>
-              <a:t>Customer Receptivity</a:t>
+              <a:t>Strategic Market Entry Approaches</a:t>
             </a:r>
           </a:p>
         </p:txBody>
@@ -3205,81 +3205,143 @@
           <a:p/>
           <a:p>
             <a:pPr>
-              <a:defRPr sz="1600"/>
-            </a:pPr>
-            <a:r>
-              <a:t>Chinese medical device exports to EU more than doubled between 2015-2023</a:t>
-            </a:r>
-          </a:p>
-          <a:p>
-            <a:pPr>
-              <a:defRPr sz="1600"/>
-            </a:pPr>
-            <a:r>
-              <a:t>Price sensitivity in low-to-mid-end devices, brand trust deficit in high-end products</a:t>
-            </a:r>
-          </a:p>
-          <a:p>
-            <a:pPr>
-              <a:defRPr sz="1600"/>
-            </a:pPr>
-            <a:r>
-              <a:t>Snibe sold 3,637 units abroad vs 1,141 domestically in first three quarters of 2022</a:t>
-            </a:r>
-          </a:p>
-          <a:p>
-            <a:pPr>
-              <a:defRPr sz="1600"/>
-            </a:pPr>
-            <a:r>
-              <a:t>Market dominated by international giants (Roche, J&amp;J, Siemens, Abbott) with strong brands</a:t>
-            </a:r>
-          </a:p>
-          <a:p>
-            <a:pPr>
-              <a:defRPr sz="1600"/>
-            </a:pPr>
-            <a:r>
-              <a:t>Chinese companies targeting small to middle size diagnostic centers with compact solutions</a:t>
-            </a:r>
-          </a:p>
-          <a:p>
-            <a:pPr>
-              <a:defRPr sz="1600"/>
-            </a:pPr>
-            <a:r>
-              <a:t>Performance-to-cost ratio creating substitution effect in international markets</a:t>
-            </a:r>
-          </a:p>
-        </p:txBody>
-      </p:sp>
-      <p:pic>
-        <p:nvPicPr>
-          <p:cNvPr id="4" name="Picture 3" descr="image.png"/>
-          <p:cNvPicPr>
-            <a:picLocks noChangeAspect="1"/>
-          </p:cNvPicPr>
-          <p:nvPr/>
-        </p:nvPicPr>
-        <p:blipFill>
-          <a:blip r:embed="rId2"/>
-          <a:stretch>
-            <a:fillRect/>
-          </a:stretch>
-        </p:blipFill>
-        <p:spPr>
-          <a:xfrm>
-            <a:off x="3657600" y="3200400"/>
-            <a:ext cx="4572000" cy="3200400"/>
-          </a:xfrm>
-          <a:prstGeom prst="rect">
-            <a:avLst/>
-          </a:prstGeom>
-        </p:spPr>
-      </p:pic>
-      <p:sp>
-        <p:nvSpPr>
-          <p:cNvPr id="5" name="TextBox 4"/>
+              <a:defRPr sz="1600">
+                <a:latin typeface="Arial"/>
+              </a:defRPr>
+            </a:pPr>
+            <a:r>
+              <a:t>Acquisition Strategy:</a:t>
+            </a:r>
+          </a:p>
+          <a:p>
+            <a:pPr>
+              <a:defRPr sz="1600">
+                <a:latin typeface="Arial"/>
+              </a:defRPr>
+            </a:pPr>
+            <a:r>
+              <a:t>  • Mindray: Acquired DiaSys (Germany) for distribution</a:t>
+            </a:r>
+          </a:p>
+          <a:p>
+            <a:pPr>
+              <a:defRPr sz="1600">
+                <a:latin typeface="Arial"/>
+              </a:defRPr>
+            </a:pPr>
+            <a:r>
+              <a:t>  • Mindray: Acquired HyTest (Finland) for raw materials</a:t>
+            </a:r>
+          </a:p>
+          <a:p>
+            <a:pPr>
+              <a:defRPr sz="1600">
+                <a:latin typeface="Arial"/>
+              </a:defRPr>
+            </a:pPr>
+            <a:r>
+              <a:t>  • Build local service capabilities and credibility</a:t>
+            </a:r>
+          </a:p>
+          <a:p>
+            <a:pPr>
+              <a:defRPr sz="1600">
+                <a:latin typeface="Arial"/>
+              </a:defRPr>
+            </a:pPr>
+          </a:p>
+          <a:p>
+            <a:pPr>
+              <a:defRPr sz="1600">
+                <a:latin typeface="Arial"/>
+              </a:defRPr>
+            </a:pPr>
+            <a:r>
+              <a:t>Regulatory Gateway Approach:</a:t>
+            </a:r>
+          </a:p>
+          <a:p>
+            <a:pPr>
+              <a:defRPr sz="1600">
+                <a:latin typeface="Arial"/>
+              </a:defRPr>
+            </a:pPr>
+            <a:r>
+              <a:t>  • Eastern Europe: Hungary, Greece as EU entry points</a:t>
+            </a:r>
+          </a:p>
+          <a:p>
+            <a:pPr>
+              <a:defRPr sz="1600">
+                <a:latin typeface="Arial"/>
+              </a:defRPr>
+            </a:pPr>
+            <a:r>
+              <a:t>  • Strict markets: Germany, Netherlands for credibility</a:t>
+            </a:r>
+          </a:p>
+          <a:p>
+            <a:pPr>
+              <a:defRPr sz="1600">
+                <a:latin typeface="Arial"/>
+              </a:defRPr>
+            </a:pPr>
+            <a:r>
+              <a:t>  • IVDR certification as market access prerequisite</a:t>
+            </a:r>
+          </a:p>
+          <a:p>
+            <a:pPr>
+              <a:defRPr sz="1600">
+                <a:latin typeface="Arial"/>
+              </a:defRPr>
+            </a:pPr>
+          </a:p>
+          <a:p>
+            <a:pPr>
+              <a:defRPr sz="1600">
+                <a:latin typeface="Arial"/>
+              </a:defRPr>
+            </a:pPr>
+            <a:r>
+              <a:t>Product Segmentation:</a:t>
+            </a:r>
+          </a:p>
+          <a:p>
+            <a:pPr>
+              <a:defRPr sz="1600">
+                <a:latin typeface="Arial"/>
+              </a:defRPr>
+            </a:pPr>
+            <a:r>
+              <a:t>  • Target small-to-mid labs with compact solutions</a:t>
+            </a:r>
+          </a:p>
+          <a:p>
+            <a:pPr>
+              <a:defRPr sz="1600">
+                <a:latin typeface="Arial"/>
+              </a:defRPr>
+            </a:pPr>
+            <a:r>
+              <a:t>  • Focus on cost-effective segments initially</a:t>
+            </a:r>
+          </a:p>
+          <a:p>
+            <a:pPr>
+              <a:defRPr sz="1600">
+                <a:latin typeface="Arial"/>
+              </a:defRPr>
+            </a:pPr>
+            <a:r>
+              <a:t>  • Gradually move up value chain with proven quality</a:t>
+            </a:r>
+          </a:p>
+        </p:txBody>
+      </p:sp>
+      <p:sp>
+        <p:nvSpPr>
+          <p:cNvPr id="4" name="TextBox 3"/>
           <p:cNvSpPr txBox="1"/>
           <p:nvPr/>
         </p:nvSpPr>
@@ -3298,36 +3360,29 @@
             <a:spAutoFit/>
           </a:bodyPr>
           <a:lstStyle/>
+          <a:p/>
+          <a:p>
+            <a:pPr>
+              <a:defRPr sz="1000" b="1" i="1"/>
+            </a:pPr>
+            <a:r>
+              <a:t>References:</a:t>
+            </a:r>
+          </a:p>
           <a:p>
             <a:pPr>
               <a:defRPr sz="1000" i="1"/>
             </a:pPr>
             <a:r>
-              <a:t>References:</a:t>
-            </a:r>
-          </a:p>
-          <a:p>
-            <a:pPr>
-              <a:defRPr sz="900" i="1"/>
-            </a:pPr>
-            <a:r>
-              <a:t>[1] https://ec.europa.eu/commission/presscorner/detail/en/ip_25_1569</a:t>
-            </a:r>
-          </a:p>
-          <a:p>
-            <a:pPr>
-              <a:defRPr sz="900" i="1"/>
-            </a:pPr>
-            <a:r>
-              <a:t>[2] https://drive.google.com/file/d/1zt3vNjOlugypsvPkywduyWNRPGTHrsoj/view?usp=drive_link</a:t>
-            </a:r>
-          </a:p>
-          <a:p>
-            <a:pPr>
-              <a:defRPr sz="900" i="1"/>
-            </a:pPr>
-            <a:r>
-              <a:t>[3] https://en.caclp.com/industry-news/2365.html</a:t>
+              <a:t>[1] https://drive.google.com/file/d/1zt3vNjOlugypsvPkywduyWNRPGTHrsoj/view?usp=drive_link</a:t>
+            </a:r>
+          </a:p>
+          <a:p>
+            <a:pPr>
+              <a:defRPr sz="1000" i="1"/>
+            </a:pPr>
+            <a:r>
+              <a:t>[9] https://en.caclp.com/industry-news/3349.html</a:t>
             </a:r>
           </a:p>
         </p:txBody>
@@ -3366,7 +3421,7 @@
           <a:lstStyle/>
           <a:p>
             <a:r>
-              <a:t>Strategic Opportunities</a:t>
+              <a:t>Financial Capability Analysis</a:t>
             </a:r>
           </a:p>
         </p:txBody>
@@ -3386,59 +3441,582 @@
           <a:bodyPr/>
           <a:lstStyle/>
           <a:p/>
-          <a:p>
-            <a:pPr>
-              <a:defRPr sz="1600"/>
-            </a:pPr>
-            <a:r>
-              <a:t>Strategic acquisitions of European companies to secure supply chains and credibility</a:t>
-            </a:r>
-          </a:p>
-          <a:p>
-            <a:pPr>
-              <a:defRPr sz="1600"/>
-            </a:pPr>
-            <a:r>
-              <a:t>Targeting Eastern European countries (Hungary, Greece) as gateways to EU market</a:t>
-            </a:r>
-          </a:p>
-          <a:p>
-            <a:pPr>
-              <a:defRPr sz="1600"/>
-            </a:pPr>
-            <a:r>
-              <a:t>Leveraging German/Dutch certification for enhanced brand credibility</a:t>
-            </a:r>
-          </a:p>
-          <a:p>
-            <a:pPr>
-              <a:defRPr sz="1600"/>
-            </a:pPr>
-            <a:r>
-              <a:t>Focus on high-margin chemiluminescence sector with 20-25% localization rate in China</a:t>
-            </a:r>
-          </a:p>
-          <a:p>
-            <a:pPr>
-              <a:defRPr sz="1600"/>
-            </a:pPr>
-            <a:r>
-              <a:t>Developing compact POCT solutions for decentralized testing segments</a:t>
-            </a:r>
-          </a:p>
-          <a:p>
-            <a:pPr>
-              <a:defRPr sz="1600"/>
-            </a:pPr>
-            <a:r>
-              <a:t>Utilizing cost-effectiveness advantage for price-sensitive market segments</a:t>
-            </a:r>
-          </a:p>
-        </p:txBody>
-      </p:sp>
-      <p:sp>
-        <p:nvSpPr>
-          <p:cNvPr id="4" name="TextBox 3"/>
+        </p:txBody>
+      </p:sp>
+      <p:graphicFrame>
+        <p:nvGraphicFramePr>
+          <p:cNvPr id="4" name="Table 3"/>
+          <p:cNvGraphicFramePr>
+            <a:graphicFrameLocks noGrp="1"/>
+          </p:cNvGraphicFramePr>
+          <p:nvPr/>
+        </p:nvGraphicFramePr>
+        <p:xfrm>
+          <a:off x="457200" y="1828800"/>
+          <a:ext cx="8229600" cy="2286000"/>
+        </p:xfrm>
+        <a:graphic>
+          <a:graphicData uri="http://schemas.openxmlformats.org/drawingml/2006/table">
+            <a:tbl>
+              <a:tblPr firstRow="1" bandRow="1">
+                <a:tableStyleId>{5C22544A-7EE6-4342-B048-85BDC9FD1C3A}</a:tableStyleId>
+              </a:tblPr>
+              <a:tblGrid>
+                <a:gridCol w="1645920"/>
+                <a:gridCol w="1645920"/>
+                <a:gridCol w="1645920"/>
+                <a:gridCol w="1645920"/>
+                <a:gridCol w="1645920"/>
+              </a:tblGrid>
+              <a:tr h="457200">
+                <a:tc>
+                  <a:txBody>
+                    <a:bodyPr/>
+                    <a:lstStyle/>
+                    <a:p>
+                      <a:pPr>
+                        <a:defRPr sz="1200" b="1">
+                          <a:solidFill>
+                            <a:srgbClr val="FFFFFF"/>
+                          </a:solidFill>
+                          <a:latin typeface="Arial"/>
+                        </a:defRPr>
+                      </a:pPr>
+                      <a:r>
+                        <a:t>Company</a:t>
+                      </a:r>
+                    </a:p>
+                  </a:txBody>
+                  <a:tcPr>
+                    <a:solidFill>
+                      <a:srgbClr val="2E75B6"/>
+                    </a:solidFill>
+                  </a:tcPr>
+                </a:tc>
+                <a:tc>
+                  <a:txBody>
+                    <a:bodyPr/>
+                    <a:lstStyle/>
+                    <a:p>
+                      <a:pPr>
+                        <a:defRPr sz="1200" b="1">
+                          <a:solidFill>
+                            <a:srgbClr val="FFFFFF"/>
+                          </a:solidFill>
+                          <a:latin typeface="Arial"/>
+                        </a:defRPr>
+                      </a:pPr>
+                      <a:r>
+                        <a:t>2023 Revenue</a:t>
+                      </a:r>
+                    </a:p>
+                  </a:txBody>
+                  <a:tcPr>
+                    <a:solidFill>
+                      <a:srgbClr val="2E75B6"/>
+                    </a:solidFill>
+                  </a:tcPr>
+                </a:tc>
+                <a:tc>
+                  <a:txBody>
+                    <a:bodyPr/>
+                    <a:lstStyle/>
+                    <a:p>
+                      <a:pPr>
+                        <a:defRPr sz="1200" b="1">
+                          <a:solidFill>
+                            <a:srgbClr val="FFFFFF"/>
+                          </a:solidFill>
+                          <a:latin typeface="Arial"/>
+                        </a:defRPr>
+                      </a:pPr>
+                      <a:r>
+                        <a:t>YoY Growth</a:t>
+                      </a:r>
+                    </a:p>
+                  </a:txBody>
+                  <a:tcPr>
+                    <a:solidFill>
+                      <a:srgbClr val="2E75B6"/>
+                    </a:solidFill>
+                  </a:tcPr>
+                </a:tc>
+                <a:tc>
+                  <a:txBody>
+                    <a:bodyPr/>
+                    <a:lstStyle/>
+                    <a:p>
+                      <a:pPr>
+                        <a:defRPr sz="1200" b="1">
+                          <a:solidFill>
+                            <a:srgbClr val="FFFFFF"/>
+                          </a:solidFill>
+                          <a:latin typeface="Arial"/>
+                        </a:defRPr>
+                      </a:pPr>
+                      <a:r>
+                        <a:t>R&amp;D Investment</a:t>
+                      </a:r>
+                    </a:p>
+                  </a:txBody>
+                  <a:tcPr>
+                    <a:solidFill>
+                      <a:srgbClr val="2E75B6"/>
+                    </a:solidFill>
+                  </a:tcPr>
+                </a:tc>
+                <a:tc>
+                  <a:txBody>
+                    <a:bodyPr/>
+                    <a:lstStyle/>
+                    <a:p>
+                      <a:pPr>
+                        <a:defRPr sz="1200" b="1">
+                          <a:solidFill>
+                            <a:srgbClr val="FFFFFF"/>
+                          </a:solidFill>
+                          <a:latin typeface="Arial"/>
+                        </a:defRPr>
+                      </a:pPr>
+                      <a:r>
+                        <a:t>Overseas Growth</a:t>
+                      </a:r>
+                    </a:p>
+                  </a:txBody>
+                  <a:tcPr>
+                    <a:solidFill>
+                      <a:srgbClr val="2E75B6"/>
+                    </a:solidFill>
+                  </a:tcPr>
+                </a:tc>
+              </a:tr>
+              <a:tr h="457200">
+                <a:tc>
+                  <a:txBody>
+                    <a:bodyPr/>
+                    <a:lstStyle/>
+                    <a:p>
+                      <a:pPr>
+                        <a:defRPr sz="1200">
+                          <a:latin typeface="Arial"/>
+                        </a:defRPr>
+                      </a:pPr>
+                      <a:r>
+                        <a:t>Mindray</a:t>
+                      </a:r>
+                    </a:p>
+                  </a:txBody>
+                  <a:tcPr/>
+                </a:tc>
+                <a:tc>
+                  <a:txBody>
+                    <a:bodyPr/>
+                    <a:lstStyle/>
+                    <a:p>
+                      <a:pPr>
+                        <a:defRPr sz="1200">
+                          <a:latin typeface="Arial"/>
+                        </a:defRPr>
+                      </a:pPr>
+                      <a:r>
+                        <a:t>CNY 34.93B</a:t>
+                      </a:r>
+                    </a:p>
+                  </a:txBody>
+                  <a:tcPr/>
+                </a:tc>
+                <a:tc>
+                  <a:txBody>
+                    <a:bodyPr/>
+                    <a:lstStyle/>
+                    <a:p>
+                      <a:pPr>
+                        <a:defRPr sz="1200">
+                          <a:latin typeface="Arial"/>
+                        </a:defRPr>
+                      </a:pPr>
+                      <a:r>
+                        <a:t>20%+ (6 years)</a:t>
+                      </a:r>
+                    </a:p>
+                  </a:txBody>
+                  <a:tcPr/>
+                </a:tc>
+                <a:tc>
+                  <a:txBody>
+                    <a:bodyPr/>
+                    <a:lstStyle/>
+                    <a:p>
+                      <a:pPr>
+                        <a:defRPr sz="1200">
+                          <a:latin typeface="Arial"/>
+                        </a:defRPr>
+                      </a:pPr>
+                      <a:r>
+                        <a:t>10.99% of revenue</a:t>
+                      </a:r>
+                    </a:p>
+                  </a:txBody>
+                  <a:tcPr/>
+                </a:tc>
+                <a:tc>
+                  <a:txBody>
+                    <a:bodyPr/>
+                    <a:lstStyle/>
+                    <a:p>
+                      <a:pPr>
+                        <a:defRPr sz="1200">
+                          <a:latin typeface="Arial"/>
+                        </a:defRPr>
+                      </a:pPr>
+                      <a:r>
+                        <a:t>30%+</a:t>
+                      </a:r>
+                    </a:p>
+                  </a:txBody>
+                  <a:tcPr/>
+                </a:tc>
+              </a:tr>
+              <a:tr h="457200">
+                <a:tc>
+                  <a:txBody>
+                    <a:bodyPr/>
+                    <a:lstStyle/>
+                    <a:p>
+                      <a:pPr>
+                        <a:defRPr sz="1200">
+                          <a:latin typeface="Arial"/>
+                        </a:defRPr>
+                      </a:pPr>
+                      <a:r>
+                        <a:t>Snibe</a:t>
+                      </a:r>
+                    </a:p>
+                  </a:txBody>
+                  <a:tcPr/>
+                </a:tc>
+                <a:tc>
+                  <a:txBody>
+                    <a:bodyPr/>
+                    <a:lstStyle/>
+                    <a:p>
+                      <a:pPr>
+                        <a:defRPr sz="1200">
+                          <a:latin typeface="Arial"/>
+                        </a:defRPr>
+                      </a:pPr>
+                      <a:r>
+                        <a:t>CNY 1.021B</a:t>
+                      </a:r>
+                    </a:p>
+                  </a:txBody>
+                  <a:tcPr/>
+                </a:tc>
+                <a:tc>
+                  <a:txBody>
+                    <a:bodyPr/>
+                    <a:lstStyle/>
+                    <a:p>
+                      <a:pPr>
+                        <a:defRPr sz="1200">
+                          <a:latin typeface="Arial"/>
+                        </a:defRPr>
+                      </a:pPr>
+                      <a:r>
+                        <a:t>16.62%</a:t>
+                      </a:r>
+                    </a:p>
+                  </a:txBody>
+                  <a:tcPr/>
+                </a:tc>
+                <a:tc>
+                  <a:txBody>
+                    <a:bodyPr/>
+                    <a:lstStyle/>
+                    <a:p>
+                      <a:pPr>
+                        <a:defRPr sz="1200">
+                          <a:latin typeface="Arial"/>
+                        </a:defRPr>
+                      </a:pPr>
+                      <a:r>
+                        <a:t>Not specified</a:t>
+                      </a:r>
+                    </a:p>
+                  </a:txBody>
+                  <a:tcPr/>
+                </a:tc>
+                <a:tc>
+                  <a:txBody>
+                    <a:bodyPr/>
+                    <a:lstStyle/>
+                    <a:p>
+                      <a:pPr>
+                        <a:defRPr sz="1200">
+                          <a:latin typeface="Arial"/>
+                        </a:defRPr>
+                      </a:pPr>
+                      <a:r>
+                        <a:t>Strong</a:t>
+                      </a:r>
+                    </a:p>
+                  </a:txBody>
+                  <a:tcPr/>
+                </a:tc>
+              </a:tr>
+              <a:tr h="457200">
+                <a:tc>
+                  <a:txBody>
+                    <a:bodyPr/>
+                    <a:lstStyle/>
+                    <a:p>
+                      <a:pPr>
+                        <a:defRPr sz="1200">
+                          <a:latin typeface="Arial"/>
+                        </a:defRPr>
+                      </a:pPr>
+                      <a:r>
+                        <a:t>Autobio</a:t>
+                      </a:r>
+                    </a:p>
+                  </a:txBody>
+                  <a:tcPr/>
+                </a:tc>
+                <a:tc>
+                  <a:txBody>
+                    <a:bodyPr/>
+                    <a:lstStyle/>
+                    <a:p>
+                      <a:pPr>
+                        <a:defRPr sz="1200">
+                          <a:latin typeface="Arial"/>
+                        </a:defRPr>
+                      </a:pPr>
+                      <a:r>
+                        <a:t>Positive</a:t>
+                      </a:r>
+                    </a:p>
+                  </a:txBody>
+                  <a:tcPr/>
+                </a:tc>
+                <a:tc>
+                  <a:txBody>
+                    <a:bodyPr/>
+                    <a:lstStyle/>
+                    <a:p>
+                      <a:pPr>
+                        <a:defRPr sz="1200">
+                          <a:latin typeface="Arial"/>
+                        </a:defRPr>
+                      </a:pPr>
+                      <a:r>
+                        <a:t>Growth</a:t>
+                      </a:r>
+                    </a:p>
+                  </a:txBody>
+                  <a:tcPr/>
+                </a:tc>
+                <a:tc>
+                  <a:txBody>
+                    <a:bodyPr/>
+                    <a:lstStyle/>
+                    <a:p>
+                      <a:pPr>
+                        <a:defRPr sz="1200">
+                          <a:latin typeface="Arial"/>
+                        </a:defRPr>
+                      </a:pPr>
+                      <a:r>
+                        <a:t>Not specified</a:t>
+                      </a:r>
+                    </a:p>
+                  </a:txBody>
+                  <a:tcPr/>
+                </a:tc>
+                <a:tc>
+                  <a:txBody>
+                    <a:bodyPr/>
+                    <a:lstStyle/>
+                    <a:p>
+                      <a:pPr>
+                        <a:defRPr sz="1200">
+                          <a:latin typeface="Arial"/>
+                        </a:defRPr>
+                      </a:pPr>
+                      <a:r>
+                        <a:t>27.6%</a:t>
+                      </a:r>
+                    </a:p>
+                  </a:txBody>
+                  <a:tcPr/>
+                </a:tc>
+              </a:tr>
+              <a:tr h="457200">
+                <a:tc>
+                  <a:txBody>
+                    <a:bodyPr/>
+                    <a:lstStyle/>
+                    <a:p>
+                      <a:pPr>
+                        <a:defRPr sz="1200">
+                          <a:latin typeface="Arial"/>
+                        </a:defRPr>
+                      </a:pPr>
+                      <a:r>
+                        <a:t>Dirui</a:t>
+                      </a:r>
+                    </a:p>
+                  </a:txBody>
+                  <a:tcPr/>
+                </a:tc>
+                <a:tc>
+                  <a:txBody>
+                    <a:bodyPr/>
+                    <a:lstStyle/>
+                    <a:p>
+                      <a:pPr>
+                        <a:defRPr sz="1200">
+                          <a:latin typeface="Arial"/>
+                        </a:defRPr>
+                      </a:pPr>
+                      <a:r>
+                        <a:t>CNY 663M</a:t>
+                      </a:r>
+                    </a:p>
+                  </a:txBody>
+                  <a:tcPr/>
+                </a:tc>
+                <a:tc>
+                  <a:txBody>
+                    <a:bodyPr/>
+                    <a:lstStyle/>
+                    <a:p>
+                      <a:pPr>
+                        <a:defRPr sz="1200">
+                          <a:latin typeface="Arial"/>
+                        </a:defRPr>
+                      </a:pPr>
+                      <a:r>
+                        <a:t>99.60%</a:t>
+                      </a:r>
+                    </a:p>
+                  </a:txBody>
+                  <a:tcPr/>
+                </a:tc>
+                <a:tc>
+                  <a:txBody>
+                    <a:bodyPr/>
+                    <a:lstStyle/>
+                    <a:p>
+                      <a:pPr>
+                        <a:defRPr sz="1200">
+                          <a:latin typeface="Arial"/>
+                        </a:defRPr>
+                      </a:pPr>
+                      <a:r>
+                        <a:t>Not specified</a:t>
+                      </a:r>
+                    </a:p>
+                  </a:txBody>
+                  <a:tcPr/>
+                </a:tc>
+                <a:tc>
+                  <a:txBody>
+                    <a:bodyPr/>
+                    <a:lstStyle/>
+                    <a:p>
+                      <a:pPr>
+                        <a:defRPr sz="1200">
+                          <a:latin typeface="Arial"/>
+                        </a:defRPr>
+                      </a:pPr>
+                      <a:r>
+                        <a:t>Not specified</a:t>
+                      </a:r>
+                    </a:p>
+                  </a:txBody>
+                  <a:tcPr/>
+                </a:tc>
+              </a:tr>
+            </a:tbl>
+          </a:graphicData>
+        </a:graphic>
+      </p:graphicFrame>
+      <p:sp>
+        <p:nvSpPr>
+          <p:cNvPr id="5" name="TextBox 4"/>
+          <p:cNvSpPr txBox="1"/>
+          <p:nvPr/>
+        </p:nvSpPr>
+        <p:spPr>
+          <a:xfrm>
+            <a:off x="457200" y="4114800"/>
+            <a:ext cx="8229600" cy="1371600"/>
+          </a:xfrm>
+          <a:prstGeom prst="rect">
+            <a:avLst/>
+          </a:prstGeom>
+          <a:noFill/>
+        </p:spPr>
+        <p:txBody>
+          <a:bodyPr wrap="none">
+            <a:spAutoFit/>
+          </a:bodyPr>
+          <a:lstStyle/>
+          <a:p/>
+          <a:p>
+            <a:pPr>
+              <a:defRPr sz="1400"/>
+            </a:pPr>
+            <a:r>
+              <a:t>Key Financial Trends:</a:t>
+            </a:r>
+          </a:p>
+          <a:p>
+            <a:pPr>
+              <a:defRPr sz="1400"/>
+            </a:pPr>
+            <a:r>
+              <a:t>• Post-COVID market correction: 53.26% revenue drop industry-wide</a:t>
+            </a:r>
+          </a:p>
+          <a:p>
+            <a:pPr>
+              <a:defRPr sz="1400"/>
+            </a:pPr>
+            <a:r>
+              <a:t>• Top players maintained growth despite market challenges</a:t>
+            </a:r>
+          </a:p>
+          <a:p>
+            <a:pPr>
+              <a:defRPr sz="1400"/>
+            </a:pPr>
+            <a:r>
+              <a:t>• Strong R&amp;D investment positioning for innovation competition</a:t>
+            </a:r>
+          </a:p>
+          <a:p>
+            <a:pPr>
+              <a:defRPr sz="1400"/>
+            </a:pPr>
+            <a:r>
+              <a:t>• Overseas revenue growth outpacing domestic performance</a:t>
+            </a:r>
+          </a:p>
+          <a:p>
+            <a:pPr>
+              <a:defRPr sz="1400"/>
+            </a:pPr>
+            <a:r>
+              <a:t>• Financial capacity for strategic acquisitions and expansion</a:t>
+            </a:r>
+          </a:p>
+        </p:txBody>
+      </p:sp>
+      <p:sp>
+        <p:nvSpPr>
+          <p:cNvPr id="6" name="TextBox 5"/>
           <p:cNvSpPr txBox="1"/>
           <p:nvPr/>
         </p:nvSpPr>
@@ -3457,28 +4035,29 @@
             <a:spAutoFit/>
           </a:bodyPr>
           <a:lstStyle/>
+          <a:p/>
+          <a:p>
+            <a:pPr>
+              <a:defRPr sz="1000" b="1" i="1"/>
+            </a:pPr>
+            <a:r>
+              <a:t>References:</a:t>
+            </a:r>
+          </a:p>
           <a:p>
             <a:pPr>
               <a:defRPr sz="1000" i="1"/>
             </a:pPr>
             <a:r>
-              <a:t>References:</a:t>
-            </a:r>
-          </a:p>
-          <a:p>
-            <a:pPr>
-              <a:defRPr sz="900" i="1"/>
-            </a:pPr>
-            <a:r>
-              <a:t>[1] https://drive.google.com/file/d/1zt3vNjOlugypsvPkywduyWNRPGTHrsoj/view?usp=drive_link</a:t>
-            </a:r>
-          </a:p>
-          <a:p>
-            <a:pPr>
-              <a:defRPr sz="900" i="1"/>
-            </a:pPr>
-            <a:r>
-              <a:t>[2] https://en.caclp.com/industry-news/1161.html</a:t>
+              <a:t>[5] https://en.caclp.com/industry-news/2785.html</a:t>
+            </a:r>
+          </a:p>
+          <a:p>
+            <a:pPr>
+              <a:defRPr sz="1000" i="1"/>
+            </a:pPr>
+            <a:r>
+              <a:t>[6] https://en.caclp.com/industry-news/2808.html</a:t>
             </a:r>
           </a:p>
         </p:txBody>
@@ -3517,7 +4096,7 @@
           <a:lstStyle/>
           <a:p>
             <a:r>
-              <a:t>Risks &amp; Challenges</a:t>
+              <a:t>Risk Assessment Matrix</a:t>
             </a:r>
           </a:p>
         </p:txBody>
@@ -3537,59 +4116,557 @@
           <a:bodyPr/>
           <a:lstStyle/>
           <a:p/>
-          <a:p>
-            <a:pPr>
-              <a:defRPr sz="1600"/>
-            </a:pPr>
-            <a:r>
-              <a:t>EU supply chain localization policies increasing uncertainty for Chinese exporters</a:t>
-            </a:r>
-          </a:p>
-          <a:p>
-            <a:pPr>
-              <a:defRPr sz="1600"/>
-            </a:pPr>
-            <a:r>
-              <a:t>Complex international regulatory and certification barriers (FDA PMA, EU CE-MDR)</a:t>
-            </a:r>
-          </a:p>
-          <a:p>
-            <a:pPr>
-              <a:defRPr sz="1600"/>
-            </a:pPr>
-            <a:r>
-              <a:t>Technology and intellectual property risks in developed markets</a:t>
-            </a:r>
-          </a:p>
-          <a:p>
-            <a:pPr>
-              <a:defRPr sz="1600"/>
-            </a:pPr>
-            <a:r>
-              <a:t>Difficulty in localization and building brand trust in high-end segments</a:t>
-            </a:r>
-          </a:p>
-          <a:p>
-            <a:pPr>
-              <a:defRPr sz="1600"/>
-            </a:pPr>
-            <a:r>
-              <a:t>Geopolitical tensions affecting market access through IPI restrictions</a:t>
-            </a:r>
-          </a:p>
-          <a:p>
-            <a:pPr>
-              <a:defRPr sz="1600"/>
-            </a:pPr>
-            <a:r>
-              <a:t>Market fragmentation requiring country-specific strategies</a:t>
-            </a:r>
-          </a:p>
-        </p:txBody>
-      </p:sp>
-      <p:sp>
-        <p:nvSpPr>
-          <p:cNvPr id="4" name="TextBox 3"/>
+        </p:txBody>
+      </p:sp>
+      <p:graphicFrame>
+        <p:nvGraphicFramePr>
+          <p:cNvPr id="4" name="Table 3"/>
+          <p:cNvGraphicFramePr>
+            <a:graphicFrameLocks noGrp="1"/>
+          </p:cNvGraphicFramePr>
+          <p:nvPr/>
+        </p:nvGraphicFramePr>
+        <p:xfrm>
+          <a:off x="457200" y="1828800"/>
+          <a:ext cx="8229600" cy="3200400"/>
+        </p:xfrm>
+        <a:graphic>
+          <a:graphicData uri="http://schemas.openxmlformats.org/drawingml/2006/table">
+            <a:tbl>
+              <a:tblPr firstRow="1" bandRow="1">
+                <a:tableStyleId>{5C22544A-7EE6-4342-B048-85BDC9FD1C3A}</a:tableStyleId>
+              </a:tblPr>
+              <a:tblGrid>
+                <a:gridCol w="2057400"/>
+                <a:gridCol w="2057400"/>
+                <a:gridCol w="2057400"/>
+                <a:gridCol w="2057400"/>
+              </a:tblGrid>
+              <a:tr h="457200">
+                <a:tc>
+                  <a:txBody>
+                    <a:bodyPr/>
+                    <a:lstStyle/>
+                    <a:p>
+                      <a:pPr>
+                        <a:defRPr sz="1200" b="1">
+                          <a:solidFill>
+                            <a:srgbClr val="FFFFFF"/>
+                          </a:solidFill>
+                          <a:latin typeface="Arial"/>
+                        </a:defRPr>
+                      </a:pPr>
+                      <a:r>
+                        <a:t>Risk Category</a:t>
+                      </a:r>
+                    </a:p>
+                  </a:txBody>
+                  <a:tcPr>
+                    <a:solidFill>
+                      <a:srgbClr val="2E75B6"/>
+                    </a:solidFill>
+                  </a:tcPr>
+                </a:tc>
+                <a:tc>
+                  <a:txBody>
+                    <a:bodyPr/>
+                    <a:lstStyle/>
+                    <a:p>
+                      <a:pPr>
+                        <a:defRPr sz="1200" b="1">
+                          <a:solidFill>
+                            <a:srgbClr val="FFFFFF"/>
+                          </a:solidFill>
+                          <a:latin typeface="Arial"/>
+                        </a:defRPr>
+                      </a:pPr>
+                      <a:r>
+                        <a:t>Impact</a:t>
+                      </a:r>
+                    </a:p>
+                  </a:txBody>
+                  <a:tcPr>
+                    <a:solidFill>
+                      <a:srgbClr val="2E75B6"/>
+                    </a:solidFill>
+                  </a:tcPr>
+                </a:tc>
+                <a:tc>
+                  <a:txBody>
+                    <a:bodyPr/>
+                    <a:lstStyle/>
+                    <a:p>
+                      <a:pPr>
+                        <a:defRPr sz="1200" b="1">
+                          <a:solidFill>
+                            <a:srgbClr val="FFFFFF"/>
+                          </a:solidFill>
+                          <a:latin typeface="Arial"/>
+                        </a:defRPr>
+                      </a:pPr>
+                      <a:r>
+                        <a:t>Likelihood</a:t>
+                      </a:r>
+                    </a:p>
+                  </a:txBody>
+                  <a:tcPr>
+                    <a:solidFill>
+                      <a:srgbClr val="2E75B6"/>
+                    </a:solidFill>
+                  </a:tcPr>
+                </a:tc>
+                <a:tc>
+                  <a:txBody>
+                    <a:bodyPr/>
+                    <a:lstStyle/>
+                    <a:p>
+                      <a:pPr>
+                        <a:defRPr sz="1200" b="1">
+                          <a:solidFill>
+                            <a:srgbClr val="FFFFFF"/>
+                          </a:solidFill>
+                          <a:latin typeface="Arial"/>
+                        </a:defRPr>
+                      </a:pPr>
+                      <a:r>
+                        <a:t>Mitigation Strategy</a:t>
+                      </a:r>
+                    </a:p>
+                  </a:txBody>
+                  <a:tcPr>
+                    <a:solidFill>
+                      <a:srgbClr val="2E75B6"/>
+                    </a:solidFill>
+                  </a:tcPr>
+                </a:tc>
+              </a:tr>
+              <a:tr h="457200">
+                <a:tc>
+                  <a:txBody>
+                    <a:bodyPr/>
+                    <a:lstStyle/>
+                    <a:p>
+                      <a:pPr>
+                        <a:defRPr sz="1200">
+                          <a:latin typeface="Arial"/>
+                        </a:defRPr>
+                      </a:pPr>
+                      <a:r>
+                        <a:t>Regulatory Changes</a:t>
+                      </a:r>
+                    </a:p>
+                  </a:txBody>
+                  <a:tcPr/>
+                </a:tc>
+                <a:tc>
+                  <a:txBody>
+                    <a:bodyPr/>
+                    <a:lstStyle/>
+                    <a:p>
+                      <a:pPr>
+                        <a:defRPr sz="1200">
+                          <a:latin typeface="Arial"/>
+                        </a:defRPr>
+                      </a:pPr>
+                      <a:r>
+                        <a:t>High</a:t>
+                      </a:r>
+                    </a:p>
+                  </a:txBody>
+                  <a:tcPr/>
+                </a:tc>
+                <a:tc>
+                  <a:txBody>
+                    <a:bodyPr/>
+                    <a:lstStyle/>
+                    <a:p>
+                      <a:pPr>
+                        <a:defRPr sz="1200">
+                          <a:latin typeface="Arial"/>
+                        </a:defRPr>
+                      </a:pPr>
+                      <a:r>
+                        <a:t>High</a:t>
+                      </a:r>
+                    </a:p>
+                  </a:txBody>
+                  <a:tcPr/>
+                </a:tc>
+                <a:tc>
+                  <a:txBody>
+                    <a:bodyPr/>
+                    <a:lstStyle/>
+                    <a:p>
+                      <a:pPr>
+                        <a:defRPr sz="1200">
+                          <a:latin typeface="Arial"/>
+                        </a:defRPr>
+                      </a:pPr>
+                      <a:r>
+                        <a:t>Early IVDR compliance, local expertise</a:t>
+                      </a:r>
+                    </a:p>
+                  </a:txBody>
+                  <a:tcPr/>
+                </a:tc>
+              </a:tr>
+              <a:tr h="457200">
+                <a:tc>
+                  <a:txBody>
+                    <a:bodyPr/>
+                    <a:lstStyle/>
+                    <a:p>
+                      <a:pPr>
+                        <a:defRPr sz="1200">
+                          <a:latin typeface="Arial"/>
+                        </a:defRPr>
+                      </a:pPr>
+                      <a:r>
+                        <a:t>Geopolitical Tensions</a:t>
+                      </a:r>
+                    </a:p>
+                  </a:txBody>
+                  <a:tcPr/>
+                </a:tc>
+                <a:tc>
+                  <a:txBody>
+                    <a:bodyPr/>
+                    <a:lstStyle/>
+                    <a:p>
+                      <a:pPr>
+                        <a:defRPr sz="1200">
+                          <a:latin typeface="Arial"/>
+                        </a:defRPr>
+                      </a:pPr>
+                      <a:r>
+                        <a:t>High</a:t>
+                      </a:r>
+                    </a:p>
+                  </a:txBody>
+                  <a:tcPr/>
+                </a:tc>
+                <a:tc>
+                  <a:txBody>
+                    <a:bodyPr/>
+                    <a:lstStyle/>
+                    <a:p>
+                      <a:pPr>
+                        <a:defRPr sz="1200">
+                          <a:latin typeface="Arial"/>
+                        </a:defRPr>
+                      </a:pPr>
+                      <a:r>
+                        <a:t>Medium</a:t>
+                      </a:r>
+                    </a:p>
+                  </a:txBody>
+                  <a:tcPr/>
+                </a:tc>
+                <a:tc>
+                  <a:txBody>
+                    <a:bodyPr/>
+                    <a:lstStyle/>
+                    <a:p>
+                      <a:pPr>
+                        <a:defRPr sz="1200">
+                          <a:latin typeface="Arial"/>
+                        </a:defRPr>
+                      </a:pPr>
+                      <a:r>
+                        <a:t>Diversification, local manufacturing</a:t>
+                      </a:r>
+                    </a:p>
+                  </a:txBody>
+                  <a:tcPr/>
+                </a:tc>
+              </a:tr>
+              <a:tr h="457200">
+                <a:tc>
+                  <a:txBody>
+                    <a:bodyPr/>
+                    <a:lstStyle/>
+                    <a:p>
+                      <a:pPr>
+                        <a:defRPr sz="1200">
+                          <a:latin typeface="Arial"/>
+                        </a:defRPr>
+                      </a:pPr>
+                      <a:r>
+                        <a:t>Supply Chain Disruption</a:t>
+                      </a:r>
+                    </a:p>
+                  </a:txBody>
+                  <a:tcPr/>
+                </a:tc>
+                <a:tc>
+                  <a:txBody>
+                    <a:bodyPr/>
+                    <a:lstStyle/>
+                    <a:p>
+                      <a:pPr>
+                        <a:defRPr sz="1200">
+                          <a:latin typeface="Arial"/>
+                        </a:defRPr>
+                      </a:pPr>
+                      <a:r>
+                        <a:t>Medium</a:t>
+                      </a:r>
+                    </a:p>
+                  </a:txBody>
+                  <a:tcPr/>
+                </a:tc>
+                <a:tc>
+                  <a:txBody>
+                    <a:bodyPr/>
+                    <a:lstStyle/>
+                    <a:p>
+                      <a:pPr>
+                        <a:defRPr sz="1200">
+                          <a:latin typeface="Arial"/>
+                        </a:defRPr>
+                      </a:pPr>
+                      <a:r>
+                        <a:t>High</a:t>
+                      </a:r>
+                    </a:p>
+                  </a:txBody>
+                  <a:tcPr/>
+                </a:tc>
+                <a:tc>
+                  <a:txBody>
+                    <a:bodyPr/>
+                    <a:lstStyle/>
+                    <a:p>
+                      <a:pPr>
+                        <a:defRPr sz="1200">
+                          <a:latin typeface="Arial"/>
+                        </a:defRPr>
+                      </a:pPr>
+                      <a:r>
+                        <a:t>Local sourcing, multiple suppliers</a:t>
+                      </a:r>
+                    </a:p>
+                  </a:txBody>
+                  <a:tcPr/>
+                </a:tc>
+              </a:tr>
+              <a:tr h="457200">
+                <a:tc>
+                  <a:txBody>
+                    <a:bodyPr/>
+                    <a:lstStyle/>
+                    <a:p>
+                      <a:pPr>
+                        <a:defRPr sz="1200">
+                          <a:latin typeface="Arial"/>
+                        </a:defRPr>
+                      </a:pPr>
+                      <a:r>
+                        <a:t>Brand Perception</a:t>
+                      </a:r>
+                    </a:p>
+                  </a:txBody>
+                  <a:tcPr/>
+                </a:tc>
+                <a:tc>
+                  <a:txBody>
+                    <a:bodyPr/>
+                    <a:lstStyle/>
+                    <a:p>
+                      <a:pPr>
+                        <a:defRPr sz="1200">
+                          <a:latin typeface="Arial"/>
+                        </a:defRPr>
+                      </a:pPr>
+                      <a:r>
+                        <a:t>Medium</a:t>
+                      </a:r>
+                    </a:p>
+                  </a:txBody>
+                  <a:tcPr/>
+                </a:tc>
+                <a:tc>
+                  <a:txBody>
+                    <a:bodyPr/>
+                    <a:lstStyle/>
+                    <a:p>
+                      <a:pPr>
+                        <a:defRPr sz="1200">
+                          <a:latin typeface="Arial"/>
+                        </a:defRPr>
+                      </a:pPr>
+                      <a:r>
+                        <a:t>High</a:t>
+                      </a:r>
+                    </a:p>
+                  </a:txBody>
+                  <a:tcPr/>
+                </a:tc>
+                <a:tc>
+                  <a:txBody>
+                    <a:bodyPr/>
+                    <a:lstStyle/>
+                    <a:p>
+                      <a:pPr>
+                        <a:defRPr sz="1200">
+                          <a:latin typeface="Arial"/>
+                        </a:defRPr>
+                      </a:pPr>
+                      <a:r>
+                        <a:t>Acquisitions, quality evidence</a:t>
+                      </a:r>
+                    </a:p>
+                  </a:txBody>
+                  <a:tcPr/>
+                </a:tc>
+              </a:tr>
+              <a:tr h="457200">
+                <a:tc>
+                  <a:txBody>
+                    <a:bodyPr/>
+                    <a:lstStyle/>
+                    <a:p>
+                      <a:pPr>
+                        <a:defRPr sz="1200">
+                          <a:latin typeface="Arial"/>
+                        </a:defRPr>
+                      </a:pPr>
+                      <a:r>
+                        <a:t>Price Competition</a:t>
+                      </a:r>
+                    </a:p>
+                  </a:txBody>
+                  <a:tcPr/>
+                </a:tc>
+                <a:tc>
+                  <a:txBody>
+                    <a:bodyPr/>
+                    <a:lstStyle/>
+                    <a:p>
+                      <a:pPr>
+                        <a:defRPr sz="1200">
+                          <a:latin typeface="Arial"/>
+                        </a:defRPr>
+                      </a:pPr>
+                      <a:r>
+                        <a:t>Medium</a:t>
+                      </a:r>
+                    </a:p>
+                  </a:txBody>
+                  <a:tcPr/>
+                </a:tc>
+                <a:tc>
+                  <a:txBody>
+                    <a:bodyPr/>
+                    <a:lstStyle/>
+                    <a:p>
+                      <a:pPr>
+                        <a:defRPr sz="1200">
+                          <a:latin typeface="Arial"/>
+                        </a:defRPr>
+                      </a:pPr>
+                      <a:r>
+                        <a:t>High</a:t>
+                      </a:r>
+                    </a:p>
+                  </a:txBody>
+                  <a:tcPr/>
+                </a:tc>
+                <a:tc>
+                  <a:txBody>
+                    <a:bodyPr/>
+                    <a:lstStyle/>
+                    <a:p>
+                      <a:pPr>
+                        <a:defRPr sz="1200">
+                          <a:latin typeface="Arial"/>
+                        </a:defRPr>
+                      </a:pPr>
+                      <a:r>
+                        <a:t>Differentiation, value demonstration</a:t>
+                      </a:r>
+                    </a:p>
+                  </a:txBody>
+                  <a:tcPr/>
+                </a:tc>
+              </a:tr>
+              <a:tr h="457200">
+                <a:tc>
+                  <a:txBody>
+                    <a:bodyPr/>
+                    <a:lstStyle/>
+                    <a:p>
+                      <a:pPr>
+                        <a:defRPr sz="1200">
+                          <a:latin typeface="Arial"/>
+                        </a:defRPr>
+                      </a:pPr>
+                      <a:r>
+                        <a:t>Currency Fluctuation</a:t>
+                      </a:r>
+                    </a:p>
+                  </a:txBody>
+                  <a:tcPr/>
+                </a:tc>
+                <a:tc>
+                  <a:txBody>
+                    <a:bodyPr/>
+                    <a:lstStyle/>
+                    <a:p>
+                      <a:pPr>
+                        <a:defRPr sz="1200">
+                          <a:latin typeface="Arial"/>
+                        </a:defRPr>
+                      </a:pPr>
+                      <a:r>
+                        <a:t>Medium</a:t>
+                      </a:r>
+                    </a:p>
+                  </a:txBody>
+                  <a:tcPr/>
+                </a:tc>
+                <a:tc>
+                  <a:txBody>
+                    <a:bodyPr/>
+                    <a:lstStyle/>
+                    <a:p>
+                      <a:pPr>
+                        <a:defRPr sz="1200">
+                          <a:latin typeface="Arial"/>
+                        </a:defRPr>
+                      </a:pPr>
+                      <a:r>
+                        <a:t>Medium</a:t>
+                      </a:r>
+                    </a:p>
+                  </a:txBody>
+                  <a:tcPr/>
+                </a:tc>
+                <a:tc>
+                  <a:txBody>
+                    <a:bodyPr/>
+                    <a:lstStyle/>
+                    <a:p>
+                      <a:pPr>
+                        <a:defRPr sz="1200">
+                          <a:latin typeface="Arial"/>
+                        </a:defRPr>
+                      </a:pPr>
+                      <a:r>
+                        <a:t>Hedging, local operations</a:t>
+                      </a:r>
+                    </a:p>
+                  </a:txBody>
+                  <a:tcPr/>
+                </a:tc>
+              </a:tr>
+            </a:tbl>
+          </a:graphicData>
+        </a:graphic>
+      </p:graphicFrame>
+      <p:sp>
+        <p:nvSpPr>
+          <p:cNvPr id="5" name="TextBox 4"/>
           <p:cNvSpPr txBox="1"/>
           <p:nvPr/>
         </p:nvSpPr>
@@ -3608,25 +4685,26 @@
             <a:spAutoFit/>
           </a:bodyPr>
           <a:lstStyle/>
+          <a:p/>
+          <a:p>
+            <a:pPr>
+              <a:defRPr sz="1000" b="1" i="1"/>
+            </a:pPr>
+            <a:r>
+              <a:t>References:</a:t>
+            </a:r>
+          </a:p>
           <a:p>
             <a:pPr>
               <a:defRPr sz="1000" i="1"/>
             </a:pPr>
             <a:r>
-              <a:t>References:</a:t>
-            </a:r>
-          </a:p>
-          <a:p>
-            <a:pPr>
-              <a:defRPr sz="900" i="1"/>
-            </a:pPr>
-            <a:r>
               <a:t>[1] https://drive.google.com/file/d/1zt3vNjOlugypsvPkywduyWNRPGTHrsoj/view?usp=drive_link</a:t>
             </a:r>
           </a:p>
           <a:p>
             <a:pPr>
-              <a:defRPr sz="900" i="1"/>
+              <a:defRPr sz="1000" i="1"/>
             </a:pPr>
             <a:r>
               <a:t>[2] https://ec.europa.eu/commission/presscorner/detail/en/ip_25_1569</a:t>
@@ -3668,7 +4746,7 @@
           <a:lstStyle/>
           <a:p>
             <a:r>
-              <a:t>Recommendations</a:t>
+              <a:t>Strategic Recommendations</a:t>
             </a:r>
           </a:p>
         </p:txBody>
@@ -3690,58 +4768,173 @@
           <a:p/>
           <a:p>
             <a:pPr>
-              <a:defRPr sz="1600"/>
-            </a:pPr>
-            <a:r>
-              <a:t>Establish local European manufacturing and service capabilities through acquisitions</a:t>
-            </a:r>
-          </a:p>
-          <a:p>
-            <a:pPr>
-              <a:defRPr sz="1600"/>
-            </a:pPr>
-            <a:r>
-              <a:t>Develop country-specific market entry strategies accounting for reimbursement variations</a:t>
-            </a:r>
-          </a:p>
-          <a:p>
-            <a:pPr>
-              <a:defRPr sz="1600"/>
-            </a:pPr>
-            <a:r>
-              <a:t>Invest in high-level IVDR compliance and environmental regulation (REACH) expertise</a:t>
-            </a:r>
-          </a:p>
-          <a:p>
-            <a:pPr>
-              <a:defRPr sz="1600"/>
-            </a:pPr>
-            <a:r>
-              <a:t>Build strategic partnerships with European distributors and service providers</a:t>
-            </a:r>
-          </a:p>
-          <a:p>
-            <a:pPr>
-              <a:defRPr sz="1600"/>
-            </a:pPr>
-            <a:r>
-              <a:t>Focus product development on high-margin segments with competitive advantages</a:t>
-            </a:r>
-          </a:p>
-          <a:p>
-            <a:pPr>
-              <a:defRPr sz="1600"/>
-            </a:pPr>
-            <a:r>
-              <a:t>Diversify geographic focus to include Eastern European gateway markets</a:t>
-            </a:r>
-          </a:p>
-          <a:p>
-            <a:pPr>
-              <a:defRPr sz="1600"/>
-            </a:pPr>
-            <a:r>
-              <a:t>Develop strong clinical evidence and KOL relationships to overcome trust deficit</a:t>
+              <a:defRPr sz="1600">
+                <a:latin typeface="Arial"/>
+              </a:defRPr>
+            </a:pPr>
+            <a:r>
+              <a:t>1. Regulatory First Approach:</a:t>
+            </a:r>
+          </a:p>
+          <a:p>
+            <a:pPr>
+              <a:defRPr sz="1600">
+                <a:latin typeface="Arial"/>
+              </a:defRPr>
+            </a:pPr>
+            <a:r>
+              <a:t>   • Prioritize full IVDR compliance across product portfolio</a:t>
+            </a:r>
+          </a:p>
+          <a:p>
+            <a:pPr>
+              <a:defRPr sz="1600">
+                <a:latin typeface="Arial"/>
+              </a:defRPr>
+            </a:pPr>
+            <a:r>
+              <a:t>   • Establish European regulatory affairs capability</a:t>
+            </a:r>
+          </a:p>
+          <a:p>
+            <a:pPr>
+              <a:defRPr sz="1600">
+                <a:latin typeface="Arial"/>
+              </a:defRPr>
+            </a:pPr>
+          </a:p>
+          <a:p>
+            <a:pPr>
+              <a:defRPr sz="1600">
+                <a:latin typeface="Arial"/>
+              </a:defRPr>
+            </a:pPr>
+            <a:r>
+              <a:t>2. Localization Strategy:</a:t>
+            </a:r>
+          </a:p>
+          <a:p>
+            <a:pPr>
+              <a:defRPr sz="1600">
+                <a:latin typeface="Arial"/>
+              </a:defRPr>
+            </a:pPr>
+            <a:r>
+              <a:t>   • Consider local manufacturing to overcome input restrictions</a:t>
+            </a:r>
+          </a:p>
+          <a:p>
+            <a:pPr>
+              <a:defRPr sz="1600">
+                <a:latin typeface="Arial"/>
+              </a:defRPr>
+            </a:pPr>
+            <a:r>
+              <a:t>   • Build local service and support networks</a:t>
+            </a:r>
+          </a:p>
+          <a:p>
+            <a:pPr>
+              <a:defRPr sz="1600">
+                <a:latin typeface="Arial"/>
+              </a:defRPr>
+            </a:pPr>
+            <a:r>
+              <a:t>   • Acquire European companies for market access</a:t>
+            </a:r>
+          </a:p>
+          <a:p>
+            <a:pPr>
+              <a:defRPr sz="1600">
+                <a:latin typeface="Arial"/>
+              </a:defRPr>
+            </a:pPr>
+          </a:p>
+          <a:p>
+            <a:pPr>
+              <a:defRPr sz="1600">
+                <a:latin typeface="Arial"/>
+              </a:defRPr>
+            </a:pPr>
+            <a:r>
+              <a:t>3. Market Segmentation:</a:t>
+            </a:r>
+          </a:p>
+          <a:p>
+            <a:pPr>
+              <a:defRPr sz="1600">
+                <a:latin typeface="Arial"/>
+              </a:defRPr>
+            </a:pPr>
+            <a:r>
+              <a:t>   • Target smaller contracts (&lt;€5M) initially</a:t>
+            </a:r>
+          </a:p>
+          <a:p>
+            <a:pPr>
+              <a:defRPr sz="1600">
+                <a:latin typeface="Arial"/>
+              </a:defRPr>
+            </a:pPr>
+            <a:r>
+              <a:t>   • Focus on cost-sensitive segments with proven value</a:t>
+            </a:r>
+          </a:p>
+          <a:p>
+            <a:pPr>
+              <a:defRPr sz="1600">
+                <a:latin typeface="Arial"/>
+              </a:defRPr>
+            </a:pPr>
+            <a:r>
+              <a:t>   • Gradually build credibility for high-end offerings</a:t>
+            </a:r>
+          </a:p>
+          <a:p>
+            <a:pPr>
+              <a:defRPr sz="1600">
+                <a:latin typeface="Arial"/>
+              </a:defRPr>
+            </a:pPr>
+          </a:p>
+          <a:p>
+            <a:pPr>
+              <a:defRPr sz="1600">
+                <a:latin typeface="Arial"/>
+              </a:defRPr>
+            </a:pPr>
+            <a:r>
+              <a:t>4. Partnership Development:</a:t>
+            </a:r>
+          </a:p>
+          <a:p>
+            <a:pPr>
+              <a:defRPr sz="1600">
+                <a:latin typeface="Arial"/>
+              </a:defRPr>
+            </a:pPr>
+            <a:r>
+              <a:t>   • Collaborate with European distributors</a:t>
+            </a:r>
+          </a:p>
+          <a:p>
+            <a:pPr>
+              <a:defRPr sz="1600">
+                <a:latin typeface="Arial"/>
+              </a:defRPr>
+            </a:pPr>
+            <a:r>
+              <a:t>   • Establish KOL relationships for credibility</a:t>
+            </a:r>
+          </a:p>
+          <a:p>
+            <a:pPr>
+              <a:defRPr sz="1600">
+                <a:latin typeface="Arial"/>
+              </a:defRPr>
+            </a:pPr>
+            <a:r>
+              <a:t>   • Partner with local service providers</a:t>
             </a:r>
           </a:p>
         </p:txBody>
@@ -3780,7 +4973,7 @@
           <a:lstStyle/>
           <a:p>
             <a:r>
-              <a:t>Conclusion</a:t>
+              <a:t>Implementation Roadmap</a:t>
             </a:r>
           </a:p>
         </p:txBody>
@@ -3802,50 +4995,166 @@
           <a:p/>
           <a:p>
             <a:pPr>
-              <a:defRPr sz="1600"/>
-            </a:pPr>
-            <a:r>
-              <a:t>European IVD market presents significant opportunity but requires sophisticated approach</a:t>
-            </a:r>
-          </a:p>
-          <a:p>
-            <a:pPr>
-              <a:defRPr sz="1600"/>
-            </a:pPr>
-            <a:r>
-              <a:t>Regulatory compliance (IVDR) is foundational but insufficient without localization strategy</a:t>
-            </a:r>
-          </a:p>
-          <a:p>
-            <a:pPr>
-              <a:defRPr sz="1600"/>
-            </a:pPr>
-            <a:r>
-              <a:t>Geopolitical factors increasingly influencing market access conditions</a:t>
-            </a:r>
-          </a:p>
-          <a:p>
-            <a:pPr>
-              <a:defRPr sz="1600"/>
-            </a:pPr>
-            <a:r>
-              <a:t>Leading Chinese companies demonstrating capability to compete through acquisitions and innovation</a:t>
-            </a:r>
-          </a:p>
-          <a:p>
-            <a:pPr>
-              <a:defRPr sz="1600"/>
-            </a:pPr>
-            <a:r>
-              <a:t>Success requires balancing cost-effectiveness with quality perception and local presence</a:t>
-            </a:r>
-          </a:p>
-          <a:p>
-            <a:pPr>
-              <a:defRPr sz="1600"/>
-            </a:pPr>
-            <a:r>
-              <a:t>Market shifting from export economics to requirement for deep European localization</a:t>
+              <a:defRPr sz="1600">
+                <a:latin typeface="Arial"/>
+              </a:defRPr>
+            </a:pPr>
+            <a:r>
+              <a:t>Short-Term (0-12 months):</a:t>
+            </a:r>
+          </a:p>
+          <a:p>
+            <a:pPr>
+              <a:defRPr sz="1600">
+                <a:latin typeface="Arial"/>
+              </a:defRPr>
+            </a:pPr>
+            <a:r>
+              <a:t>  • Complete IVDR certification for key products</a:t>
+            </a:r>
+          </a:p>
+          <a:p>
+            <a:pPr>
+              <a:defRPr sz="1600">
+                <a:latin typeface="Arial"/>
+              </a:defRPr>
+            </a:pPr>
+            <a:r>
+              <a:t>  • Establish European regulatory compliance team</a:t>
+            </a:r>
+          </a:p>
+          <a:p>
+            <a:pPr>
+              <a:defRPr sz="1600">
+                <a:latin typeface="Arial"/>
+              </a:defRPr>
+            </a:pPr>
+            <a:r>
+              <a:t>  • Develop distribution partnerships</a:t>
+            </a:r>
+          </a:p>
+          <a:p>
+            <a:pPr>
+              <a:defRPr sz="1600">
+                <a:latin typeface="Arial"/>
+              </a:defRPr>
+            </a:pPr>
+            <a:r>
+              <a:t>  • Target Eastern European gateway markets</a:t>
+            </a:r>
+          </a:p>
+          <a:p>
+            <a:pPr>
+              <a:defRPr sz="1600">
+                <a:latin typeface="Arial"/>
+              </a:defRPr>
+            </a:pPr>
+          </a:p>
+          <a:p>
+            <a:pPr>
+              <a:defRPr sz="1600">
+                <a:latin typeface="Arial"/>
+              </a:defRPr>
+            </a:pPr>
+            <a:r>
+              <a:t>Medium-Term (12-36 months):</a:t>
+            </a:r>
+          </a:p>
+          <a:p>
+            <a:pPr>
+              <a:defRPr sz="1600">
+                <a:latin typeface="Arial"/>
+              </a:defRPr>
+            </a:pPr>
+            <a:r>
+              <a:t>  • Achieve 50+ IVDR certifications</a:t>
+            </a:r>
+          </a:p>
+          <a:p>
+            <a:pPr>
+              <a:defRPr sz="1600">
+                <a:latin typeface="Arial"/>
+              </a:defRPr>
+            </a:pPr>
+            <a:r>
+              <a:t>  • Establish local service capabilities</a:t>
+            </a:r>
+          </a:p>
+          <a:p>
+            <a:pPr>
+              <a:defRPr sz="1600">
+                <a:latin typeface="Arial"/>
+              </a:defRPr>
+            </a:pPr>
+            <a:r>
+              <a:t>  • Develop country-specific reimbursement strategies</a:t>
+            </a:r>
+          </a:p>
+          <a:p>
+            <a:pPr>
+              <a:defRPr sz="1600">
+                <a:latin typeface="Arial"/>
+              </a:defRPr>
+            </a:pPr>
+            <a:r>
+              <a:t>  • Explore acquisition opportunities</a:t>
+            </a:r>
+          </a:p>
+          <a:p>
+            <a:pPr>
+              <a:defRPr sz="1600">
+                <a:latin typeface="Arial"/>
+              </a:defRPr>
+            </a:pPr>
+          </a:p>
+          <a:p>
+            <a:pPr>
+              <a:defRPr sz="1600">
+                <a:latin typeface="Arial"/>
+              </a:defRPr>
+            </a:pPr>
+            <a:r>
+              <a:t>Long-Term (36+ months):</a:t>
+            </a:r>
+          </a:p>
+          <a:p>
+            <a:pPr>
+              <a:defRPr sz="1600">
+                <a:latin typeface="Arial"/>
+              </a:defRPr>
+            </a:pPr>
+            <a:r>
+              <a:t>  • Establish local manufacturing presence</a:t>
+            </a:r>
+          </a:p>
+          <a:p>
+            <a:pPr>
+              <a:defRPr sz="1600">
+                <a:latin typeface="Arial"/>
+              </a:defRPr>
+            </a:pPr>
+            <a:r>
+              <a:t>  • Build brand recognition in high-end segments</a:t>
+            </a:r>
+          </a:p>
+          <a:p>
+            <a:pPr>
+              <a:defRPr sz="1600">
+                <a:latin typeface="Arial"/>
+              </a:defRPr>
+            </a:pPr>
+            <a:r>
+              <a:t>  • Achieve top 5 market position in selected segments</a:t>
+            </a:r>
+          </a:p>
+          <a:p>
+            <a:pPr>
+              <a:defRPr sz="1600">
+                <a:latin typeface="Arial"/>
+              </a:defRPr>
+            </a:pPr>
+            <a:r>
+              <a:t>  • Develop innovative products for European needs</a:t>
             </a:r>
           </a:p>
         </p:txBody>
@@ -3884,7 +5193,7 @@
           <a:lstStyle/>
           <a:p>
             <a:r>
-              <a:t>Sources</a:t>
+              <a:t>Conclusion: Path to European Success</a:t>
             </a:r>
           </a:p>
         </p:txBody>
@@ -3906,34 +5215,128 @@
           <a:p/>
           <a:p>
             <a:pPr>
-              <a:defRPr sz="1400"/>
-            </a:pPr>
-            <a:r>
-              <a:t>Frost &amp; Sullivan: 2025 Blue Book on Global Expansion of Chinese Medical Devices</a:t>
-            </a:r>
-          </a:p>
-          <a:p>
-            <a:pPr>
-              <a:defRPr sz="1400"/>
-            </a:pPr>
-            <a:r>
-              <a:t>European Commission: Restrictions on Chinese participation in medical devices procurement</a:t>
-            </a:r>
-          </a:p>
-          <a:p>
-            <a:pPr>
-              <a:defRPr sz="1400"/>
-            </a:pPr>
-            <a:r>
-              <a:t>CACLP: Various industry news articles on Chinese IVD company performance</a:t>
-            </a:r>
-          </a:p>
-          <a:p>
-            <a:pPr>
-              <a:defRPr sz="1400"/>
-            </a:pPr>
-            <a:r>
-              <a:t>Multiple company announcements and regulatory filings</a:t>
+              <a:defRPr sz="1600">
+                <a:latin typeface="Arial"/>
+              </a:defRPr>
+            </a:pPr>
+            <a:r>
+              <a:t>• European IVD market offers significant opportunity but requires strategic approach</a:t>
+            </a:r>
+          </a:p>
+          <a:p>
+            <a:pPr>
+              <a:defRPr sz="1600">
+                <a:latin typeface="Arial"/>
+              </a:defRPr>
+            </a:pPr>
+            <a:r>
+              <a:t>• Regulatory compliance (IVDR) is non-negotiable foundation for market entry</a:t>
+            </a:r>
+          </a:p>
+          <a:p>
+            <a:pPr>
+              <a:defRPr sz="1600">
+                <a:latin typeface="Arial"/>
+              </a:defRPr>
+            </a:pPr>
+            <a:r>
+              <a:t>• Geopolitical constraints necessitate localization and partnership strategies</a:t>
+            </a:r>
+          </a:p>
+          <a:p>
+            <a:pPr>
+              <a:defRPr sz="1600">
+                <a:latin typeface="Arial"/>
+              </a:defRPr>
+            </a:pPr>
+            <a:r>
+              <a:t>• Cost-effectiveness provides competitive advantage in value segments</a:t>
+            </a:r>
+          </a:p>
+          <a:p>
+            <a:pPr>
+              <a:defRPr sz="1600">
+                <a:latin typeface="Arial"/>
+              </a:defRPr>
+            </a:pPr>
+            <a:r>
+              <a:t>• Acquisition strategy proven effective for rapid market access</a:t>
+            </a:r>
+          </a:p>
+          <a:p>
+            <a:pPr>
+              <a:defRPr sz="1600">
+                <a:latin typeface="Arial"/>
+              </a:defRPr>
+            </a:pPr>
+            <a:r>
+              <a:t>• Long-term success requires transition from exporter to local partner</a:t>
+            </a:r>
+          </a:p>
+          <a:p>
+            <a:pPr>
+              <a:defRPr sz="1600">
+                <a:latin typeface="Arial"/>
+              </a:defRPr>
+            </a:pPr>
+            <a:r>
+              <a:t>• Companies with strong financials and regulatory readiness best positioned</a:t>
+            </a:r>
+          </a:p>
+        </p:txBody>
+      </p:sp>
+      <p:sp>
+        <p:nvSpPr>
+          <p:cNvPr id="4" name="TextBox 3"/>
+          <p:cNvSpPr txBox="1"/>
+          <p:nvPr/>
+        </p:nvSpPr>
+        <p:spPr>
+          <a:xfrm>
+            <a:off x="457200" y="5943600"/>
+            <a:ext cx="8229600" cy="914400"/>
+          </a:xfrm>
+          <a:prstGeom prst="rect">
+            <a:avLst/>
+          </a:prstGeom>
+          <a:noFill/>
+        </p:spPr>
+        <p:txBody>
+          <a:bodyPr wrap="none">
+            <a:spAutoFit/>
+          </a:bodyPr>
+          <a:lstStyle/>
+          <a:p/>
+          <a:p>
+            <a:pPr>
+              <a:defRPr sz="1000" b="1" i="1"/>
+            </a:pPr>
+            <a:r>
+              <a:t>References:</a:t>
+            </a:r>
+          </a:p>
+          <a:p>
+            <a:pPr>
+              <a:defRPr sz="1000" i="1"/>
+            </a:pPr>
+            <a:r>
+              <a:t>[1] https://drive.google.com/file/d/1zt3vNjOlugypsvPkywduyWNRPGTHrsoj/view?usp=drive_link</a:t>
+            </a:r>
+          </a:p>
+          <a:p>
+            <a:pPr>
+              <a:defRPr sz="1000" i="1"/>
+            </a:pPr>
+            <a:r>
+              <a:t>[4] https://en.caclp.com/industry-news/2365.html</a:t>
+            </a:r>
+          </a:p>
+          <a:p>
+            <a:pPr>
+              <a:defRPr sz="1000" i="1"/>
+            </a:pPr>
+            <a:r>
+              <a:t>[9] https://en.caclp.com/industry-news/3349.html</a:t>
             </a:r>
           </a:p>
         </p:txBody>
@@ -3994,50 +5397,62 @@
           <a:p/>
           <a:p>
             <a:pPr>
-              <a:defRPr sz="1600"/>
-            </a:pPr>
-            <a:r>
-              <a:t>European IVD market represents high-value opportunity with €1.65T healthcare expenditure</a:t>
-            </a:r>
-          </a:p>
-          <a:p>
-            <a:pPr>
-              <a:defRPr sz="1600"/>
-            </a:pPr>
-            <a:r>
-              <a:t>Chinese suppliers face significant regulatory barriers with IVDR transition extending certification by 6-12 months</a:t>
-            </a:r>
-          </a:p>
-          <a:p>
-            <a:pPr>
-              <a:defRPr sz="1600"/>
-            </a:pPr>
-            <a:r>
-              <a:t>Geopolitical factors creating new challenges with EU restricting Chinese participation in contracts &gt;€5M</a:t>
-            </a:r>
-          </a:p>
-          <a:p>
-            <a:pPr>
-              <a:defRPr sz="1600"/>
-            </a:pPr>
-            <a:r>
-              <a:t>Leading Chinese companies (Mindray, Snibe, Autobio) achieving IVDR certification and showing strong overseas growth</a:t>
-            </a:r>
-          </a:p>
-          <a:p>
-            <a:pPr>
-              <a:defRPr sz="1600"/>
-            </a:pPr>
-            <a:r>
-              <a:t>Strategic acquisitions (Mindray/DiaSys, Mindray/HyTest) key to overcoming trust deficit and supply chain risks</a:t>
-            </a:r>
-          </a:p>
-          <a:p>
-            <a:pPr>
-              <a:defRPr sz="1600"/>
-            </a:pPr>
-            <a:r>
-              <a:t>Cost-effectiveness drives adoption in low-mid segments, but high-end market remains dominated by Western incumbents</a:t>
+              <a:defRPr sz="1600">
+                <a:latin typeface="Arial"/>
+              </a:defRPr>
+            </a:pPr>
+            <a:r>
+              <a:t>• European IVD market presents high-value opportunity with €1.65T healthcare expenditure</a:t>
+            </a:r>
+          </a:p>
+          <a:p>
+            <a:pPr>
+              <a:defRPr sz="1600">
+                <a:latin typeface="Arial"/>
+              </a:defRPr>
+            </a:pPr>
+            <a:r>
+              <a:t>• Chinese suppliers face significant regulatory barriers with IVDR transition extending to 2027-2028</a:t>
+            </a:r>
+          </a:p>
+          <a:p>
+            <a:pPr>
+              <a:defRPr sz="1600">
+                <a:latin typeface="Arial"/>
+              </a:defRPr>
+            </a:pPr>
+            <a:r>
+              <a:t>• Geopolitical challenges: EU restricts Chinese participation in tenders over €5M</a:t>
+            </a:r>
+          </a:p>
+          <a:p>
+            <a:pPr>
+              <a:defRPr sz="1600">
+                <a:latin typeface="Arial"/>
+              </a:defRPr>
+            </a:pPr>
+            <a:r>
+              <a:t>• Strategic acquisitions critical for market entry (e.g., Mindray's DiaSys &amp; HyTest acquisitions)</a:t>
+            </a:r>
+          </a:p>
+          <a:p>
+            <a:pPr>
+              <a:defRPr sz="1600">
+                <a:latin typeface="Arial"/>
+              </a:defRPr>
+            </a:pPr>
+            <a:r>
+              <a:t>• Cost-effectiveness drives adoption but trust deficit remains in high-end segments</a:t>
+            </a:r>
+          </a:p>
+          <a:p>
+            <a:pPr>
+              <a:defRPr sz="1600">
+                <a:latin typeface="Arial"/>
+              </a:defRPr>
+            </a:pPr>
+            <a:r>
+              <a:t>• Market shifting from export economics to deep localization requirements</a:t>
             </a:r>
           </a:p>
         </p:txBody>
@@ -4063,25 +5478,26 @@
             <a:spAutoFit/>
           </a:bodyPr>
           <a:lstStyle/>
+          <a:p/>
+          <a:p>
+            <a:pPr>
+              <a:defRPr sz="1000" b="1" i="1"/>
+            </a:pPr>
+            <a:r>
+              <a:t>References:</a:t>
+            </a:r>
+          </a:p>
           <a:p>
             <a:pPr>
               <a:defRPr sz="1000" i="1"/>
             </a:pPr>
             <a:r>
-              <a:t>References:</a:t>
-            </a:r>
-          </a:p>
-          <a:p>
-            <a:pPr>
-              <a:defRPr sz="900" i="1"/>
-            </a:pPr>
-            <a:r>
               <a:t>[1] https://drive.google.com/file/d/1zt3vNjOlugypsvPkywduyWNRPGTHrsoj/view?usp=drive_link</a:t>
             </a:r>
           </a:p>
           <a:p>
             <a:pPr>
-              <a:defRPr sz="900" i="1"/>
+              <a:defRPr sz="1000" i="1"/>
             </a:pPr>
             <a:r>
               <a:t>[2] https://ec.europa.eu/commission/presscorner/detail/en/ip_25_1569</a:t>
@@ -4145,63 +5561,69 @@
           <a:p/>
           <a:p>
             <a:pPr>
-              <a:defRPr sz="1600"/>
-            </a:pPr>
-            <a:r>
-              <a:t>Market Overview &amp; Size</a:t>
-            </a:r>
-          </a:p>
-          <a:p>
-            <a:pPr>
-              <a:defRPr sz="1600"/>
-            </a:pPr>
-            <a:r>
-              <a:t>Key Trends &amp; Developments</a:t>
-            </a:r>
-          </a:p>
-          <a:p>
-            <a:pPr>
-              <a:defRPr sz="1600"/>
-            </a:pPr>
-            <a:r>
-              <a:t>Competitive Landscape</a:t>
-            </a:r>
-          </a:p>
-          <a:p>
-            <a:pPr>
-              <a:defRPr sz="1600"/>
-            </a:pPr>
-            <a:r>
-              <a:t>Regulatory Environment</a:t>
-            </a:r>
-          </a:p>
-          <a:p>
-            <a:pPr>
-              <a:defRPr sz="1600"/>
-            </a:pPr>
-            <a:r>
-              <a:t>Access &amp; Reimbursement</a:t>
-            </a:r>
-          </a:p>
-          <a:p>
-            <a:pPr>
-              <a:defRPr sz="1600"/>
-            </a:pPr>
-            <a:r>
-              <a:t>Budget &amp; Spend Analysis</a:t>
-            </a:r>
-          </a:p>
-          <a:p>
-            <a:pPr>
-              <a:defRPr sz="1600"/>
-            </a:pPr>
-            <a:r>
-              <a:t>Customer Receptivity</a:t>
-            </a:r>
-          </a:p>
-          <a:p>
-            <a:pPr>
-              <a:defRPr sz="1600"/>
+              <a:defRPr sz="1600">
+                <a:latin typeface="Arial"/>
+              </a:defRPr>
+            </a:pPr>
+            <a:r>
+              <a:t>Market Overview &amp; Key Metrics</a:t>
+            </a:r>
+          </a:p>
+          <a:p>
+            <a:pPr>
+              <a:defRPr sz="1600">
+                <a:latin typeface="Arial"/>
+              </a:defRPr>
+            </a:pPr>
+            <a:r>
+              <a:t>Regulatory Landscape Analysis</a:t>
+            </a:r>
+          </a:p>
+          <a:p>
+            <a:pPr>
+              <a:defRPr sz="1600">
+                <a:latin typeface="Arial"/>
+              </a:defRPr>
+            </a:pPr>
+            <a:r>
+              <a:t>Competitive Intelligence</a:t>
+            </a:r>
+          </a:p>
+          <a:p>
+            <a:pPr>
+              <a:defRPr sz="1600">
+                <a:latin typeface="Arial"/>
+              </a:defRPr>
+            </a:pPr>
+            <a:r>
+              <a:t>Market Access &amp; Reimbursement</a:t>
+            </a:r>
+          </a:p>
+          <a:p>
+            <a:pPr>
+              <a:defRPr sz="1600">
+                <a:latin typeface="Arial"/>
+              </a:defRPr>
+            </a:pPr>
+            <a:r>
+              <a:t>Budget Environment &amp; Spending</a:t>
+            </a:r>
+          </a:p>
+          <a:p>
+            <a:pPr>
+              <a:defRPr sz="1600">
+                <a:latin typeface="Arial"/>
+              </a:defRPr>
+            </a:pPr>
+            <a:r>
+              <a:t>Customer Receptivity Trends</a:t>
+            </a:r>
+          </a:p>
+          <a:p>
+            <a:pPr>
+              <a:defRPr sz="1600">
+                <a:latin typeface="Arial"/>
+              </a:defRPr>
             </a:pPr>
             <a:r>
               <a:t>Strategic Opportunities</a:t>
@@ -4209,18 +5631,22 @@
           </a:p>
           <a:p>
             <a:pPr>
-              <a:defRPr sz="1600"/>
-            </a:pPr>
-            <a:r>
-              <a:t>Risks &amp; Challenges</a:t>
-            </a:r>
-          </a:p>
-          <a:p>
-            <a:pPr>
-              <a:defRPr sz="1600"/>
-            </a:pPr>
-            <a:r>
-              <a:t>Recommendations</a:t>
+              <a:defRPr sz="1600">
+                <a:latin typeface="Arial"/>
+              </a:defRPr>
+            </a:pPr>
+            <a:r>
+              <a:t>Risk Assessment</a:t>
+            </a:r>
+          </a:p>
+          <a:p>
+            <a:pPr>
+              <a:defRPr sz="1600">
+                <a:latin typeface="Arial"/>
+              </a:defRPr>
+            </a:pPr>
+            <a:r>
+              <a:t>Key Recommendations</a:t>
             </a:r>
           </a:p>
         </p:txBody>
@@ -4259,7 +5685,7 @@
           <a:lstStyle/>
           <a:p>
             <a:r>
-              <a:t>Market Overview</a:t>
+              <a:t>Market Overview: European IVD Landscape</a:t>
             </a:r>
           </a:p>
         </p:txBody>
@@ -4281,42 +5707,62 @@
           <a:p/>
           <a:p>
             <a:pPr>
-              <a:defRPr sz="1600"/>
-            </a:pPr>
-            <a:r>
-              <a:t>European healthcare expenditure: €1.65 trillion with €3,685 per capita spending</a:t>
-            </a:r>
-          </a:p>
-          <a:p>
-            <a:pPr>
-              <a:defRPr sz="1600"/>
-            </a:pPr>
-            <a:r>
-              <a:t>Government and mandatory insurance funding represents over 60% of budget structure</a:t>
-            </a:r>
-          </a:p>
-          <a:p>
-            <a:pPr>
-              <a:defRPr sz="1600"/>
-            </a:pPr>
-            <a:r>
-              <a:t>Market transitioning from COVID-era volumes back to traditional non-COVID business</a:t>
-            </a:r>
-          </a:p>
-          <a:p>
-            <a:pPr>
-              <a:defRPr sz="1600"/>
-            </a:pPr>
-            <a:r>
-              <a:t>Chinese IVD sector showing contraction with total revenue dropping 53.26% in 2023</a:t>
-            </a:r>
-          </a:p>
-          <a:p>
-            <a:pPr>
-              <a:defRPr sz="1600"/>
-            </a:pPr>
-            <a:r>
-              <a:t>Long-term demand drivers: population aging, chronic disease rates, health awareness</a:t>
+              <a:defRPr sz="1600">
+                <a:latin typeface="Arial"/>
+              </a:defRPr>
+            </a:pPr>
+            <a:r>
+              <a:t>• Total Healthcare Expenditure: €1.65 trillion (3,685 Euros per capita)</a:t>
+            </a:r>
+          </a:p>
+          <a:p>
+            <a:pPr>
+              <a:defRPr sz="1600">
+                <a:latin typeface="Arial"/>
+              </a:defRPr>
+            </a:pPr>
+            <a:r>
+              <a:t>• Government &amp; mandatory insurance funding: &gt;60% of total spending</a:t>
+            </a:r>
+          </a:p>
+          <a:p>
+            <a:pPr>
+              <a:defRPr sz="1600">
+                <a:latin typeface="Arial"/>
+              </a:defRPr>
+            </a:pPr>
+            <a:r>
+              <a:t>• Pricing system driven by public health insurance with strategic negotiations</a:t>
+            </a:r>
+          </a:p>
+          <a:p>
+            <a:pPr>
+              <a:defRPr sz="1600">
+                <a:latin typeface="Arial"/>
+              </a:defRPr>
+            </a:pPr>
+            <a:r>
+              <a:t>• Tiered reimbursement structure using DRG-based payment system</a:t>
+            </a:r>
+          </a:p>
+          <a:p>
+            <a:pPr>
+              <a:defRPr sz="1600">
+                <a:latin typeface="Arial"/>
+              </a:defRPr>
+            </a:pPr>
+            <a:r>
+              <a:t>• Additional mechanisms for innovative technologies at supplementary level</a:t>
+            </a:r>
+          </a:p>
+          <a:p>
+            <a:pPr>
+              <a:defRPr sz="1600">
+                <a:latin typeface="Arial"/>
+              </a:defRPr>
+            </a:pPr>
+            <a:r>
+              <a:t>• Public tender rules and long-term cost control priorities</a:t>
             </a:r>
           </a:p>
         </p:txBody>
@@ -4342,28 +5788,21 @@
             <a:spAutoFit/>
           </a:bodyPr>
           <a:lstStyle/>
+          <a:p/>
+          <a:p>
+            <a:pPr>
+              <a:defRPr sz="1000" b="1" i="1"/>
+            </a:pPr>
+            <a:r>
+              <a:t>References:</a:t>
+            </a:r>
+          </a:p>
           <a:p>
             <a:pPr>
               <a:defRPr sz="1000" i="1"/>
             </a:pPr>
             <a:r>
-              <a:t>References:</a:t>
-            </a:r>
-          </a:p>
-          <a:p>
-            <a:pPr>
-              <a:defRPr sz="900" i="1"/>
-            </a:pPr>
-            <a:r>
               <a:t>[1] https://drive.google.com/file/d/1zt3vNjOlugypsvPkywduyWNRPGTHrsoj/view?usp=drive_link</a:t>
-            </a:r>
-          </a:p>
-          <a:p>
-            <a:pPr>
-              <a:defRPr sz="900" i="1"/>
-            </a:pPr>
-            <a:r>
-              <a:t>[2] https://en.caclp.com/industry-news/2808.html</a:t>
             </a:r>
           </a:p>
         </p:txBody>
@@ -4402,7 +5841,7 @@
           <a:lstStyle/>
           <a:p>
             <a:r>
-              <a:t>Key Trends &amp; Developments</a:t>
+              <a:t>Regulatory Landscape: IVDR Transition</a:t>
             </a:r>
           </a:p>
         </p:txBody>
@@ -4422,59 +5861,66 @@
           <a:bodyPr/>
           <a:lstStyle/>
           <a:p/>
-          <a:p>
-            <a:pPr>
-              <a:defRPr sz="1600"/>
-            </a:pPr>
-            <a:r>
-              <a:t>IVDR transition creating market consolidation with 30% of SMEs forced out</a:t>
-            </a:r>
-          </a:p>
-          <a:p>
-            <a:pPr>
-              <a:defRPr sz="1600"/>
-            </a:pPr>
-            <a:r>
-              <a:t>Geopolitical tensions leading to EU restrictions on Chinese participation in large contracts</a:t>
-            </a:r>
-          </a:p>
-          <a:p>
-            <a:pPr>
-              <a:defRPr sz="1600"/>
-            </a:pPr>
-            <a:r>
-              <a:t>Strategic acquisitions accelerating (Mindray/DiaSys, Mindray/HyTest, Wondfo/Tisenc)</a:t>
-            </a:r>
-          </a:p>
-          <a:p>
-            <a:pPr>
-              <a:defRPr sz="1600"/>
-            </a:pPr>
-            <a:r>
-              <a:t>Localization strategies becoming critical for market access and customer trust</a:t>
-            </a:r>
-          </a:p>
-          <a:p>
-            <a:pPr>
-              <a:defRPr sz="1600"/>
-            </a:pPr>
-            <a:r>
-              <a:t>R&amp;D investment increasing with Mindray allocating 10.99% of revenue to medical R&amp;D</a:t>
-            </a:r>
-          </a:p>
-          <a:p>
-            <a:pPr>
-              <a:defRPr sz="1600"/>
-            </a:pPr>
-            <a:r>
-              <a:t>Shift toward AI and automation integration in product development</a:t>
-            </a:r>
-          </a:p>
-        </p:txBody>
-      </p:sp>
-      <p:sp>
-        <p:nvSpPr>
-          <p:cNvPr id="4" name="TextBox 3"/>
+        </p:txBody>
+      </p:sp>
+      <p:pic>
+        <p:nvPicPr>
+          <p:cNvPr id="4" name="Picture 3" descr="image.png"/>
+          <p:cNvPicPr>
+            <a:picLocks noChangeAspect="1"/>
+          </p:cNvPicPr>
+          <p:nvPr/>
+        </p:nvPicPr>
+        <p:blipFill>
+          <a:blip r:embed="rId2"/>
+          <a:stretch>
+            <a:fillRect/>
+          </a:stretch>
+        </p:blipFill>
+        <p:spPr>
+          <a:xfrm>
+            <a:off x="914400" y="1828800"/>
+            <a:ext cx="7315200" cy="3657600"/>
+          </a:xfrm>
+          <a:prstGeom prst="rect">
+            <a:avLst/>
+          </a:prstGeom>
+        </p:spPr>
+      </p:pic>
+      <p:sp>
+        <p:nvSpPr>
+          <p:cNvPr id="5" name="TextBox 4"/>
+          <p:cNvSpPr txBox="1"/>
+          <p:nvPr/>
+        </p:nvSpPr>
+        <p:spPr>
+          <a:xfrm>
+            <a:off x="914400" y="914400"/>
+            <a:ext cx="3657600" cy="914400"/>
+          </a:xfrm>
+          <a:prstGeom prst="rect">
+            <a:avLst/>
+          </a:prstGeom>
+          <a:noFill/>
+        </p:spPr>
+        <p:txBody>
+          <a:bodyPr wrap="none">
+            <a:spAutoFit/>
+          </a:bodyPr>
+          <a:lstStyle/>
+          <a:p>
+            <a:pPr>
+              <a:defRPr b="1" sz="1400"/>
+            </a:pPr>
+            <a:r>
+              <a:t>Key Regulatory Challenges</a:t>
+            </a:r>
+          </a:p>
+        </p:txBody>
+      </p:sp>
+      <p:sp>
+        <p:nvSpPr>
+          <p:cNvPr id="6" name="TextBox 5"/>
           <p:cNvSpPr txBox="1"/>
           <p:nvPr/>
         </p:nvSpPr>
@@ -4493,36 +5939,29 @@
             <a:spAutoFit/>
           </a:bodyPr>
           <a:lstStyle/>
+          <a:p/>
+          <a:p>
+            <a:pPr>
+              <a:defRPr sz="1000" b="1" i="1"/>
+            </a:pPr>
+            <a:r>
+              <a:t>References:</a:t>
+            </a:r>
+          </a:p>
           <a:p>
             <a:pPr>
               <a:defRPr sz="1000" i="1"/>
             </a:pPr>
             <a:r>
-              <a:t>References:</a:t>
-            </a:r>
-          </a:p>
-          <a:p>
-            <a:pPr>
-              <a:defRPr sz="900" i="1"/>
-            </a:pPr>
-            <a:r>
               <a:t>[1] https://drive.google.com/file/d/1zt3vNjOlugypsvPkywduyWNRPGTHrsoj/view?usp=drive_link</a:t>
             </a:r>
           </a:p>
           <a:p>
             <a:pPr>
-              <a:defRPr sz="900" i="1"/>
-            </a:pPr>
-            <a:r>
-              <a:t>[2] https://en.caclp.com/industry-news/2785.html</a:t>
-            </a:r>
-          </a:p>
-          <a:p>
-            <a:pPr>
-              <a:defRPr sz="900" i="1"/>
-            </a:pPr>
-            <a:r>
-              <a:t>[3] https://en.caclp.com/industry-news/3349.html</a:t>
+              <a:defRPr sz="1000" i="1"/>
+            </a:pPr>
+            <a:r>
+              <a:t>[8] https://en.caclp.com/industry-news/1160.html</a:t>
             </a:r>
           </a:p>
         </p:txBody>
@@ -4561,7 +6000,207 @@
           <a:lstStyle/>
           <a:p>
             <a:r>
-              <a:t>Competitive Landscape</a:t>
+              <a:t>Competitive Landscape Analysis</a:t>
+            </a:r>
+          </a:p>
+        </p:txBody>
+      </p:sp>
+      <p:sp>
+        <p:nvSpPr>
+          <p:cNvPr id="3" name="Content Placeholder 2"/>
+          <p:cNvSpPr>
+            <a:spLocks noGrp="1"/>
+          </p:cNvSpPr>
+          <p:nvPr>
+            <p:ph idx="1"/>
+          </p:nvPr>
+        </p:nvSpPr>
+        <p:spPr/>
+        <p:txBody>
+          <a:bodyPr/>
+          <a:lstStyle/>
+          <a:p/>
+        </p:txBody>
+      </p:sp>
+      <p:pic>
+        <p:nvPicPr>
+          <p:cNvPr id="4" name="Picture 3" descr="image.png"/>
+          <p:cNvPicPr>
+            <a:picLocks noChangeAspect="1"/>
+          </p:cNvPicPr>
+          <p:nvPr/>
+        </p:nvPicPr>
+        <p:blipFill>
+          <a:blip r:embed="rId2"/>
+          <a:stretch>
+            <a:fillRect/>
+          </a:stretch>
+        </p:blipFill>
+        <p:spPr>
+          <a:xfrm>
+            <a:off x="3657600" y="1828800"/>
+            <a:ext cx="4572000" cy="3657600"/>
+          </a:xfrm>
+          <a:prstGeom prst="rect">
+            <a:avLst/>
+          </a:prstGeom>
+        </p:spPr>
+      </p:pic>
+      <p:sp>
+        <p:nvSpPr>
+          <p:cNvPr id="5" name="TextBox 4"/>
+          <p:cNvSpPr txBox="1"/>
+          <p:nvPr/>
+        </p:nvSpPr>
+        <p:spPr>
+          <a:xfrm>
+            <a:off x="914400" y="1828800"/>
+            <a:ext cx="2286000" cy="3657600"/>
+          </a:xfrm>
+          <a:prstGeom prst="rect">
+            <a:avLst/>
+          </a:prstGeom>
+          <a:noFill/>
+        </p:spPr>
+        <p:txBody>
+          <a:bodyPr wrap="none">
+            <a:spAutoFit/>
+          </a:bodyPr>
+          <a:lstStyle/>
+          <a:p/>
+          <a:p>
+            <a:pPr>
+              <a:defRPr sz="1200"/>
+            </a:pPr>
+            <a:r>
+              <a:t>Market Dominance: Roche, Siemens, Abbott control ~58% of market</a:t>
+            </a:r>
+          </a:p>
+          <a:p>
+            <a:pPr>
+              <a:defRPr sz="1200"/>
+            </a:pPr>
+            <a:r>
+              <a:t>Chinese Players: Mindray (8%), Snibe (5%) gaining traction</a:t>
+            </a:r>
+          </a:p>
+          <a:p>
+            <a:pPr>
+              <a:defRPr sz="1200"/>
+            </a:pPr>
+            <a:r>
+              <a:t>Mindray: 3,914 global registrations (3,158 overseas)</a:t>
+            </a:r>
+          </a:p>
+          <a:p>
+            <a:pPr>
+              <a:defRPr sz="1200"/>
+            </a:pPr>
+            <a:r>
+              <a:t>Snibe: 1,493 global registration certificates</a:t>
+            </a:r>
+          </a:p>
+          <a:p>
+            <a:pPr>
+              <a:defRPr sz="1200"/>
+            </a:pPr>
+            <a:r>
+              <a:t>Strategic Acquisitions: Mindray acquired DiaSys (Germany) and HyTest (Finland)</a:t>
+            </a:r>
+          </a:p>
+          <a:p>
+            <a:pPr>
+              <a:defRPr sz="1200"/>
+            </a:pPr>
+            <a:r>
+              <a:t>R&amp;D Investment: Mindray allocated 10.99% of revenue to medical R&amp;D</a:t>
+            </a:r>
+          </a:p>
+        </p:txBody>
+      </p:sp>
+      <p:sp>
+        <p:nvSpPr>
+          <p:cNvPr id="6" name="TextBox 5"/>
+          <p:cNvSpPr txBox="1"/>
+          <p:nvPr/>
+        </p:nvSpPr>
+        <p:spPr>
+          <a:xfrm>
+            <a:off x="457200" y="5943600"/>
+            <a:ext cx="8229600" cy="914400"/>
+          </a:xfrm>
+          <a:prstGeom prst="rect">
+            <a:avLst/>
+          </a:prstGeom>
+          <a:noFill/>
+        </p:spPr>
+        <p:txBody>
+          <a:bodyPr wrap="none">
+            <a:spAutoFit/>
+          </a:bodyPr>
+          <a:lstStyle/>
+          <a:p/>
+          <a:p>
+            <a:pPr>
+              <a:defRPr sz="1000" b="1" i="1"/>
+            </a:pPr>
+            <a:r>
+              <a:t>References:</a:t>
+            </a:r>
+          </a:p>
+          <a:p>
+            <a:pPr>
+              <a:defRPr sz="1000" i="1"/>
+            </a:pPr>
+            <a:r>
+              <a:t>[4] https://en.caclp.com/industry-news/2365.html</a:t>
+            </a:r>
+          </a:p>
+          <a:p>
+            <a:pPr>
+              <a:defRPr sz="1000" i="1"/>
+            </a:pPr>
+            <a:r>
+              <a:t>[9] https://en.caclp.com/industry-news/3349.html</a:t>
+            </a:r>
+          </a:p>
+        </p:txBody>
+      </p:sp>
+    </p:spTree>
+  </p:cSld>
+  <p:clrMapOvr>
+    <a:masterClrMapping/>
+  </p:clrMapOvr>
+</p:sld>
+</file>
+
+<file path=ppt/slides/slide7.xml><?xml version="1.0" encoding="utf-8"?>
+<p:sld xmlns:a="http://schemas.openxmlformats.org/drawingml/2006/main" xmlns:p="http://schemas.openxmlformats.org/presentationml/2006/main" xmlns:r="http://schemas.openxmlformats.org/officeDocument/2006/relationships">
+  <p:cSld>
+    <p:spTree>
+      <p:nvGrpSpPr>
+        <p:cNvPr id="1" name=""/>
+        <p:cNvGrpSpPr/>
+        <p:nvPr/>
+      </p:nvGrpSpPr>
+      <p:grpSpPr/>
+      <p:sp>
+        <p:nvSpPr>
+          <p:cNvPr id="2" name="Title 1"/>
+          <p:cNvSpPr>
+            <a:spLocks noGrp="1"/>
+          </p:cNvSpPr>
+          <p:nvPr>
+            <p:ph type="title"/>
+          </p:nvPr>
+        </p:nvSpPr>
+        <p:spPr/>
+        <p:txBody>
+          <a:bodyPr/>
+          <a:lstStyle/>
+          <a:p>
+            <a:r>
+              <a:t>Market Access &amp; Reimbursement</a:t>
             </a:r>
           </a:p>
         </p:txBody>
@@ -4602,534 +6241,347 @@
                 <a:tableStyleId>{5C22544A-7EE6-4342-B048-85BDC9FD1C3A}</a:tableStyleId>
               </a:tblPr>
               <a:tblGrid>
-                <a:gridCol w="1463040"/>
-                <a:gridCol w="1463040"/>
-                <a:gridCol w="1463040"/>
-                <a:gridCol w="1463040"/>
-                <a:gridCol w="1463040"/>
+                <a:gridCol w="2438400"/>
+                <a:gridCol w="2438400"/>
+                <a:gridCol w="2438400"/>
               </a:tblGrid>
-              <a:tr h="391885">
-                <a:tc>
-                  <a:txBody>
-                    <a:bodyPr/>
-                    <a:lstStyle/>
-                    <a:p>
-                      <a:pPr>
-                        <a:defRPr b="1" sz="1200"/>
-                      </a:pPr>
-                      <a:r>
-                        <a:t>Company</a:t>
-                      </a:r>
-                    </a:p>
-                  </a:txBody>
-                  <a:tcPr anchor="ctr"/>
-                </a:tc>
-                <a:tc>
-                  <a:txBody>
-                    <a:bodyPr/>
-                    <a:lstStyle/>
-                    <a:p>
-                      <a:pPr>
-                        <a:defRPr b="1" sz="1200"/>
-                      </a:pPr>
-                      <a:r>
-                        <a:t>Global Registrations</a:t>
-                      </a:r>
-                    </a:p>
-                  </a:txBody>
-                  <a:tcPr anchor="ctr"/>
-                </a:tc>
-                <a:tc>
-                  <a:txBody>
-                    <a:bodyPr/>
-                    <a:lstStyle/>
-                    <a:p>
-                      <a:pPr>
-                        <a:defRPr b="1" sz="1200"/>
-                      </a:pPr>
-                      <a:r>
-                        <a:t>Overseas Registrations</a:t>
-                      </a:r>
-                    </a:p>
-                  </a:txBody>
-                  <a:tcPr anchor="ctr"/>
-                </a:tc>
-                <a:tc>
-                  <a:txBody>
-                    <a:bodyPr/>
-                    <a:lstStyle/>
-                    <a:p>
-                      <a:pPr>
-                        <a:defRPr b="1" sz="1200"/>
-                      </a:pPr>
-                      <a:r>
-                        <a:t>2024 Growth</a:t>
-                      </a:r>
-                    </a:p>
-                  </a:txBody>
-                  <a:tcPr anchor="ctr"/>
-                </a:tc>
-                <a:tc>
-                  <a:txBody>
-                    <a:bodyPr/>
-                    <a:lstStyle/>
-                    <a:p>
-                      <a:pPr>
-                        <a:defRPr b="1" sz="1200"/>
-                      </a:pPr>
-                      <a:r>
-                        <a:t>IVDR Progress</a:t>
-                      </a:r>
-                    </a:p>
-                  </a:txBody>
-                  <a:tcPr anchor="ctr"/>
+              <a:tr h="457200">
+                <a:tc>
+                  <a:txBody>
+                    <a:bodyPr/>
+                    <a:lstStyle/>
+                    <a:p>
+                      <a:pPr>
+                        <a:defRPr sz="1200" b="1">
+                          <a:solidFill>
+                            <a:srgbClr val="FFFFFF"/>
+                          </a:solidFill>
+                          <a:latin typeface="Arial"/>
+                        </a:defRPr>
+                      </a:pPr>
+                      <a:r>
+                        <a:t>Factor</a:t>
+                      </a:r>
+                    </a:p>
+                  </a:txBody>
+                  <a:tcPr>
+                    <a:solidFill>
+                      <a:srgbClr val="2E75B6"/>
+                    </a:solidFill>
+                  </a:tcPr>
+                </a:tc>
+                <a:tc>
+                  <a:txBody>
+                    <a:bodyPr/>
+                    <a:lstStyle/>
+                    <a:p>
+                      <a:pPr>
+                        <a:defRPr sz="1200" b="1">
+                          <a:solidFill>
+                            <a:srgbClr val="FFFFFF"/>
+                          </a:solidFill>
+                          <a:latin typeface="Arial"/>
+                        </a:defRPr>
+                      </a:pPr>
+                      <a:r>
+                        <a:t>Status</a:t>
+                      </a:r>
+                    </a:p>
+                  </a:txBody>
+                  <a:tcPr>
+                    <a:solidFill>
+                      <a:srgbClr val="2E75B6"/>
+                    </a:solidFill>
+                  </a:tcPr>
+                </a:tc>
+                <a:tc>
+                  <a:txBody>
+                    <a:bodyPr/>
+                    <a:lstStyle/>
+                    <a:p>
+                      <a:pPr>
+                        <a:defRPr sz="1200" b="1">
+                          <a:solidFill>
+                            <a:srgbClr val="FFFFFF"/>
+                          </a:solidFill>
+                          <a:latin typeface="Arial"/>
+                        </a:defRPr>
+                      </a:pPr>
+                      <a:r>
+                        <a:t>Impact</a:t>
+                      </a:r>
+                    </a:p>
+                  </a:txBody>
+                  <a:tcPr>
+                    <a:solidFill>
+                      <a:srgbClr val="2E75B6"/>
+                    </a:solidFill>
+                  </a:tcPr>
                 </a:tc>
               </a:tr>
-              <a:tr h="391885">
-                <a:tc>
-                  <a:txBody>
-                    <a:bodyPr/>
-                    <a:lstStyle/>
-                    <a:p>
-                      <a:pPr>
-                        <a:defRPr sz="1200"/>
-                      </a:pPr>
-                      <a:r>
-                        <a:t>Mindray</a:t>
-                      </a:r>
-                    </a:p>
-                  </a:txBody>
-                  <a:tcPr anchor="ctr"/>
-                </a:tc>
-                <a:tc>
-                  <a:txBody>
-                    <a:bodyPr/>
-                    <a:lstStyle/>
-                    <a:p>
-                      <a:pPr>
-                        <a:defRPr sz="1200"/>
-                      </a:pPr>
-                      <a:r>
-                        <a:t>3,914</a:t>
-                      </a:r>
-                    </a:p>
-                  </a:txBody>
-                  <a:tcPr anchor="ctr"/>
-                </a:tc>
-                <a:tc>
-                  <a:txBody>
-                    <a:bodyPr/>
-                    <a:lstStyle/>
-                    <a:p>
-                      <a:pPr>
-                        <a:defRPr sz="1200"/>
-                      </a:pPr>
-                      <a:r>
-                        <a:t>3,158</a:t>
-                      </a:r>
-                    </a:p>
-                  </a:txBody>
-                  <a:tcPr anchor="ctr"/>
-                </a:tc>
-                <a:tc>
-                  <a:txBody>
-                    <a:bodyPr/>
-                    <a:lstStyle/>
-                    <a:p>
-                      <a:pPr>
-                        <a:defRPr sz="1200"/>
-                      </a:pPr>
-                      <a:r>
-                        <a:t>30%+</a:t>
-                      </a:r>
-                    </a:p>
-                  </a:txBody>
-                  <a:tcPr anchor="ctr"/>
-                </a:tc>
-                <a:tc>
-                  <a:txBody>
-                    <a:bodyPr/>
-                    <a:lstStyle/>
-                    <a:p>
-                      <a:pPr>
-                        <a:defRPr sz="1200"/>
-                      </a:pPr>
-                      <a:r>
-                        <a:t>Multiple certifications</a:t>
-                      </a:r>
-                    </a:p>
-                  </a:txBody>
-                  <a:tcPr anchor="ctr"/>
+              <a:tr h="457200">
+                <a:tc>
+                  <a:txBody>
+                    <a:bodyPr/>
+                    <a:lstStyle/>
+                    <a:p>
+                      <a:pPr>
+                        <a:defRPr sz="1200">
+                          <a:latin typeface="Arial"/>
+                        </a:defRPr>
+                      </a:pPr>
+                      <a:r>
+                        <a:t>Public Tender Access</a:t>
+                      </a:r>
+                    </a:p>
+                  </a:txBody>
+                  <a:tcPr/>
+                </a:tc>
+                <a:tc>
+                  <a:txBody>
+                    <a:bodyPr/>
+                    <a:lstStyle/>
+                    <a:p>
+                      <a:pPr>
+                        <a:defRPr sz="1200">
+                          <a:latin typeface="Arial"/>
+                        </a:defRPr>
+                      </a:pPr>
+                      <a:r>
+                        <a:t>Restricted (&gt;€5M)</a:t>
+                      </a:r>
+                    </a:p>
+                  </a:txBody>
+                  <a:tcPr/>
+                </a:tc>
+                <a:tc>
+                  <a:txBody>
+                    <a:bodyPr/>
+                    <a:lstStyle/>
+                    <a:p>
+                      <a:pPr>
+                        <a:defRPr sz="1200">
+                          <a:latin typeface="Arial"/>
+                        </a:defRPr>
+                      </a:pPr>
+                      <a:r>
+                        <a:t>High Barrier</a:t>
+                      </a:r>
+                    </a:p>
+                  </a:txBody>
+                  <a:tcPr/>
                 </a:tc>
               </a:tr>
-              <a:tr h="391885">
-                <a:tc>
-                  <a:txBody>
-                    <a:bodyPr/>
-                    <a:lstStyle/>
-                    <a:p>
-                      <a:pPr>
-                        <a:defRPr sz="1200"/>
-                      </a:pPr>
-                      <a:r>
-                        <a:t>Snibe</a:t>
-                      </a:r>
-                    </a:p>
-                  </a:txBody>
-                  <a:tcPr anchor="ctr"/>
-                </a:tc>
-                <a:tc>
-                  <a:txBody>
-                    <a:bodyPr/>
-                    <a:lstStyle/>
-                    <a:p>
-                      <a:pPr>
-                        <a:defRPr sz="1200"/>
-                      </a:pPr>
-                      <a:r>
-                        <a:t>1,493</a:t>
-                      </a:r>
-                    </a:p>
-                  </a:txBody>
-                  <a:tcPr anchor="ctr"/>
-                </a:tc>
-                <a:tc>
-                  <a:txBody>
-                    <a:bodyPr/>
-                    <a:lstStyle/>
-                    <a:p>
-                      <a:pPr>
-                        <a:defRPr sz="1200"/>
-                      </a:pPr>
-                      <a:r>
-                        <a:t>N/A</a:t>
-                      </a:r>
-                    </a:p>
-                  </a:txBody>
-                  <a:tcPr anchor="ctr"/>
-                </a:tc>
-                <a:tc>
-                  <a:txBody>
-                    <a:bodyPr/>
-                    <a:lstStyle/>
-                    <a:p>
-                      <a:pPr>
-                        <a:defRPr sz="1200"/>
-                      </a:pPr>
-                      <a:r>
-                        <a:t>16.62%</a:t>
-                      </a:r>
-                    </a:p>
-                  </a:txBody>
-                  <a:tcPr anchor="ctr"/>
-                </a:tc>
-                <a:tc>
-                  <a:txBody>
-                    <a:bodyPr/>
-                    <a:lstStyle/>
-                    <a:p>
-                      <a:pPr>
-                        <a:defRPr sz="1200"/>
-                      </a:pPr>
-                      <a:r>
-                        <a:t>211 chemiluminescence reagents</a:t>
-                      </a:r>
-                    </a:p>
-                  </a:txBody>
-                  <a:tcPr anchor="ctr"/>
+              <a:tr h="457200">
+                <a:tc>
+                  <a:txBody>
+                    <a:bodyPr/>
+                    <a:lstStyle/>
+                    <a:p>
+                      <a:pPr>
+                        <a:defRPr sz="1200">
+                          <a:latin typeface="Arial"/>
+                        </a:defRPr>
+                      </a:pPr>
+                      <a:r>
+                        <a:t>Input Sourcing Limit</a:t>
+                      </a:r>
+                    </a:p>
+                  </a:txBody>
+                  <a:tcPr/>
+                </a:tc>
+                <a:tc>
+                  <a:txBody>
+                    <a:bodyPr/>
+                    <a:lstStyle/>
+                    <a:p>
+                      <a:pPr>
+                        <a:defRPr sz="1200">
+                          <a:latin typeface="Arial"/>
+                        </a:defRPr>
+                      </a:pPr>
+                      <a:r>
+                        <a:t>Max 50% Chinese</a:t>
+                      </a:r>
+                    </a:p>
+                  </a:txBody>
+                  <a:tcPr/>
+                </a:tc>
+                <a:tc>
+                  <a:txBody>
+                    <a:bodyPr/>
+                    <a:lstStyle/>
+                    <a:p>
+                      <a:pPr>
+                        <a:defRPr sz="1200">
+                          <a:latin typeface="Arial"/>
+                        </a:defRPr>
+                      </a:pPr>
+                      <a:r>
+                        <a:t>Supply Chain Risk</a:t>
+                      </a:r>
+                    </a:p>
+                  </a:txBody>
+                  <a:tcPr/>
                 </a:tc>
               </a:tr>
-              <a:tr h="391885">
-                <a:tc>
-                  <a:txBody>
-                    <a:bodyPr/>
-                    <a:lstStyle/>
-                    <a:p>
-                      <a:pPr>
-                        <a:defRPr sz="1200"/>
-                      </a:pPr>
-                      <a:r>
-                        <a:t>Maccura</a:t>
-                      </a:r>
-                    </a:p>
-                  </a:txBody>
-                  <a:tcPr anchor="ctr"/>
-                </a:tc>
-                <a:tc>
-                  <a:txBody>
-                    <a:bodyPr/>
-                    <a:lstStyle/>
-                    <a:p>
-                      <a:pPr>
-                        <a:defRPr sz="1200"/>
-                      </a:pPr>
-                      <a:r>
-                        <a:t>2,467</a:t>
-                      </a:r>
-                    </a:p>
-                  </a:txBody>
-                  <a:tcPr anchor="ctr"/>
-                </a:tc>
-                <a:tc>
-                  <a:txBody>
-                    <a:bodyPr/>
-                    <a:lstStyle/>
-                    <a:p>
-                      <a:pPr>
-                        <a:defRPr sz="1200"/>
-                      </a:pPr>
-                      <a:r>
-                        <a:t>N/A</a:t>
-                      </a:r>
-                    </a:p>
-                  </a:txBody>
-                  <a:tcPr anchor="ctr"/>
-                </a:tc>
-                <a:tc>
-                  <a:txBody>
-                    <a:bodyPr/>
-                    <a:lstStyle/>
-                    <a:p>
-                      <a:pPr>
-                        <a:defRPr sz="1200"/>
-                      </a:pPr>
-                      <a:r>
-                        <a:t>N/A</a:t>
-                      </a:r>
-                    </a:p>
-                  </a:txBody>
-                  <a:tcPr anchor="ctr"/>
-                </a:tc>
-                <a:tc>
-                  <a:txBody>
-                    <a:bodyPr/>
-                    <a:lstStyle/>
-                    <a:p>
-                      <a:pPr>
-                        <a:defRPr sz="1200"/>
-                      </a:pPr>
-                      <a:r>
-                        <a:t>N/A</a:t>
-                      </a:r>
-                    </a:p>
-                  </a:txBody>
-                  <a:tcPr anchor="ctr"/>
+              <a:tr h="457200">
+                <a:tc>
+                  <a:txBody>
+                    <a:bodyPr/>
+                    <a:lstStyle/>
+                    <a:p>
+                      <a:pPr>
+                        <a:defRPr sz="1200">
+                          <a:latin typeface="Arial"/>
+                        </a:defRPr>
+                      </a:pPr>
+                      <a:r>
+                        <a:t>Reimbursement System</a:t>
+                      </a:r>
+                    </a:p>
+                  </a:txBody>
+                  <a:tcPr/>
+                </a:tc>
+                <a:tc>
+                  <a:txBody>
+                    <a:bodyPr/>
+                    <a:lstStyle/>
+                    <a:p>
+                      <a:pPr>
+                        <a:defRPr sz="1200">
+                          <a:latin typeface="Arial"/>
+                        </a:defRPr>
+                      </a:pPr>
+                      <a:r>
+                        <a:t>DRG-Based</a:t>
+                      </a:r>
+                    </a:p>
+                  </a:txBody>
+                  <a:tcPr/>
+                </a:tc>
+                <a:tc>
+                  <a:txBody>
+                    <a:bodyPr/>
+                    <a:lstStyle/>
+                    <a:p>
+                      <a:pPr>
+                        <a:defRPr sz="1200">
+                          <a:latin typeface="Arial"/>
+                        </a:defRPr>
+                      </a:pPr>
+                      <a:r>
+                        <a:t>Value Demonstration Required</a:t>
+                      </a:r>
+                    </a:p>
+                  </a:txBody>
+                  <a:tcPr/>
                 </a:tc>
               </a:tr>
-              <a:tr h="391885">
-                <a:tc>
-                  <a:txBody>
-                    <a:bodyPr/>
-                    <a:lstStyle/>
-                    <a:p>
-                      <a:pPr>
-                        <a:defRPr sz="1200"/>
-                      </a:pPr>
-                      <a:r>
-                        <a:t>Autobio</a:t>
-                      </a:r>
-                    </a:p>
-                  </a:txBody>
-                  <a:tcPr anchor="ctr"/>
-                </a:tc>
-                <a:tc>
-                  <a:txBody>
-                    <a:bodyPr/>
-                    <a:lstStyle/>
-                    <a:p>
-                      <a:pPr>
-                        <a:defRPr sz="1200"/>
-                      </a:pPr>
-                      <a:r>
-                        <a:t>N/A</a:t>
-                      </a:r>
-                    </a:p>
-                  </a:txBody>
-                  <a:tcPr anchor="ctr"/>
-                </a:tc>
-                <a:tc>
-                  <a:txBody>
-                    <a:bodyPr/>
-                    <a:lstStyle/>
-                    <a:p>
-                      <a:pPr>
-                        <a:defRPr sz="1200"/>
-                      </a:pPr>
-                      <a:r>
-                        <a:t>N/A</a:t>
-                      </a:r>
-                    </a:p>
-                  </a:txBody>
-                  <a:tcPr anchor="ctr"/>
-                </a:tc>
-                <a:tc>
-                  <a:txBody>
-                    <a:bodyPr/>
-                    <a:lstStyle/>
-                    <a:p>
-                      <a:pPr>
-                        <a:defRPr sz="1200"/>
-                      </a:pPr>
-                      <a:r>
-                        <a:t>27.6%</a:t>
-                      </a:r>
-                    </a:p>
-                  </a:txBody>
-                  <a:tcPr anchor="ctr"/>
-                </a:tc>
-                <a:tc>
-                  <a:txBody>
-                    <a:bodyPr/>
-                    <a:lstStyle/>
-                    <a:p>
-                      <a:pPr>
-                        <a:defRPr sz="1200"/>
-                      </a:pPr>
-                      <a:r>
-                        <a:t>IVDR certified</a:t>
-                      </a:r>
-                    </a:p>
-                  </a:txBody>
-                  <a:tcPr anchor="ctr"/>
+              <a:tr h="457200">
+                <a:tc>
+                  <a:txBody>
+                    <a:bodyPr/>
+                    <a:lstStyle/>
+                    <a:p>
+                      <a:pPr>
+                        <a:defRPr sz="1200">
+                          <a:latin typeface="Arial"/>
+                        </a:defRPr>
+                      </a:pPr>
+                      <a:r>
+                        <a:t>Pricing Negotiations</a:t>
+                      </a:r>
+                    </a:p>
+                  </a:txBody>
+                  <a:tcPr/>
+                </a:tc>
+                <a:tc>
+                  <a:txBody>
+                    <a:bodyPr/>
+                    <a:lstStyle/>
+                    <a:p>
+                      <a:pPr>
+                        <a:defRPr sz="1200">
+                          <a:latin typeface="Arial"/>
+                        </a:defRPr>
+                      </a:pPr>
+                      <a:r>
+                        <a:t>Government-led</a:t>
+                      </a:r>
+                    </a:p>
+                  </a:txBody>
+                  <a:tcPr/>
+                </a:tc>
+                <a:tc>
+                  <a:txBody>
+                    <a:bodyPr/>
+                    <a:lstStyle/>
+                    <a:p>
+                      <a:pPr>
+                        <a:defRPr sz="1200">
+                          <a:latin typeface="Arial"/>
+                        </a:defRPr>
+                      </a:pPr>
+                      <a:r>
+                        <a:t>Price Pressure</a:t>
+                      </a:r>
+                    </a:p>
+                  </a:txBody>
+                  <a:tcPr/>
                 </a:tc>
               </a:tr>
-              <a:tr h="391885">
-                <a:tc>
-                  <a:txBody>
-                    <a:bodyPr/>
-                    <a:lstStyle/>
-                    <a:p>
-                      <a:pPr>
-                        <a:defRPr sz="1200"/>
-                      </a:pPr>
-                      <a:r>
-                        <a:t>Wondfo</a:t>
-                      </a:r>
-                    </a:p>
-                  </a:txBody>
-                  <a:tcPr anchor="ctr"/>
-                </a:tc>
-                <a:tc>
-                  <a:txBody>
-                    <a:bodyPr/>
-                    <a:lstStyle/>
-                    <a:p>
-                      <a:pPr>
-                        <a:defRPr sz="1200"/>
-                      </a:pPr>
-                      <a:r>
-                        <a:t>N/A</a:t>
-                      </a:r>
-                    </a:p>
-                  </a:txBody>
-                  <a:tcPr anchor="ctr"/>
-                </a:tc>
-                <a:tc>
-                  <a:txBody>
-                    <a:bodyPr/>
-                    <a:lstStyle/>
-                    <a:p>
-                      <a:pPr>
-                        <a:defRPr sz="1200"/>
-                      </a:pPr>
-                      <a:r>
-                        <a:t>140+ countries</a:t>
-                      </a:r>
-                    </a:p>
-                  </a:txBody>
-                  <a:tcPr anchor="ctr"/>
-                </a:tc>
-                <a:tc>
-                  <a:txBody>
-                    <a:bodyPr/>
-                    <a:lstStyle/>
-                    <a:p>
-                      <a:pPr>
-                        <a:defRPr sz="1200"/>
-                      </a:pPr>
-                      <a:r>
-                        <a:t>N/A</a:t>
-                      </a:r>
-                    </a:p>
-                  </a:txBody>
-                  <a:tcPr anchor="ctr"/>
-                </a:tc>
-                <a:tc>
-                  <a:txBody>
-                    <a:bodyPr/>
-                    <a:lstStyle/>
-                    <a:p>
-                      <a:pPr>
-                        <a:defRPr sz="1200"/>
-                      </a:pPr>
-                      <a:r>
-                        <a:t>IVDR QMS certified</a:t>
-                      </a:r>
-                    </a:p>
-                  </a:txBody>
-                  <a:tcPr anchor="ctr"/>
-                </a:tc>
-              </a:tr>
-              <a:tr h="391890">
-                <a:tc>
-                  <a:txBody>
-                    <a:bodyPr/>
-                    <a:lstStyle/>
-                    <a:p>
-                      <a:pPr>
-                        <a:defRPr sz="1200"/>
-                      </a:pPr>
-                    </a:p>
-                  </a:txBody>
-                  <a:tcPr anchor="ctr"/>
-                </a:tc>
-                <a:tc>
-                  <a:txBody>
-                    <a:bodyPr/>
-                    <a:lstStyle/>
-                    <a:p>
-                      <a:pPr>
-                        <a:defRPr sz="1200"/>
-                      </a:pPr>
-                    </a:p>
-                  </a:txBody>
-                  <a:tcPr anchor="ctr"/>
-                </a:tc>
-                <a:tc>
-                  <a:txBody>
-                    <a:bodyPr/>
-                    <a:lstStyle/>
-                    <a:p>
-                      <a:pPr>
-                        <a:defRPr sz="1200"/>
-                      </a:pPr>
-                    </a:p>
-                  </a:txBody>
-                  <a:tcPr anchor="ctr"/>
-                </a:tc>
-                <a:tc>
-                  <a:txBody>
-                    <a:bodyPr/>
-                    <a:lstStyle/>
-                    <a:p>
-                      <a:pPr>
-                        <a:defRPr sz="1200"/>
-                      </a:pPr>
-                    </a:p>
-                  </a:txBody>
-                  <a:tcPr anchor="ctr"/>
-                </a:tc>
-                <a:tc>
-                  <a:txBody>
-                    <a:bodyPr/>
-                    <a:lstStyle/>
-                    <a:p>
-                      <a:pPr>
-                        <a:defRPr sz="1200"/>
-                      </a:pPr>
-                    </a:p>
-                  </a:txBody>
-                  <a:tcPr anchor="ctr"/>
+              <a:tr h="457200">
+                <a:tc>
+                  <a:txBody>
+                    <a:bodyPr/>
+                    <a:lstStyle/>
+                    <a:p>
+                      <a:pPr>
+                        <a:defRPr sz="1200">
+                          <a:latin typeface="Arial"/>
+                        </a:defRPr>
+                      </a:pPr>
+                      <a:r>
+                        <a:t>Innovative Tech</a:t>
+                      </a:r>
+                    </a:p>
+                  </a:txBody>
+                  <a:tcPr/>
+                </a:tc>
+                <a:tc>
+                  <a:txBody>
+                    <a:bodyPr/>
+                    <a:lstStyle/>
+                    <a:p>
+                      <a:pPr>
+                        <a:defRPr sz="1200">
+                          <a:latin typeface="Arial"/>
+                        </a:defRPr>
+                      </a:pPr>
+                      <a:r>
+                        <a:t>Supplementary Funding</a:t>
+                      </a:r>
+                    </a:p>
+                  </a:txBody>
+                  <a:tcPr/>
+                </a:tc>
+                <a:tc>
+                  <a:txBody>
+                    <a:bodyPr/>
+                    <a:lstStyle/>
+                    <a:p>
+                      <a:pPr>
+                        <a:defRPr sz="1200">
+                          <a:latin typeface="Arial"/>
+                        </a:defRPr>
+                      </a:pPr>
+                      <a:r>
+                        <a:t>Opportunity for Premium</a:t>
+                      </a:r>
+                    </a:p>
+                  </a:txBody>
+                  <a:tcPr/>
                 </a:tc>
               </a:tr>
             </a:tbl>
@@ -5139,6 +6591,70 @@
       <p:sp>
         <p:nvSpPr>
           <p:cNvPr id="5" name="TextBox 4"/>
+          <p:cNvSpPr txBox="1"/>
+          <p:nvPr/>
+        </p:nvSpPr>
+        <p:spPr>
+          <a:xfrm>
+            <a:off x="914400" y="4572000"/>
+            <a:ext cx="7315200" cy="1371600"/>
+          </a:xfrm>
+          <a:prstGeom prst="rect">
+            <a:avLst/>
+          </a:prstGeom>
+          <a:noFill/>
+        </p:spPr>
+        <p:txBody>
+          <a:bodyPr wrap="none">
+            <a:spAutoFit/>
+          </a:bodyPr>
+          <a:lstStyle/>
+          <a:p/>
+          <a:p>
+            <a:pPr>
+              <a:defRPr sz="1400"/>
+            </a:pPr>
+            <a:r>
+              <a:t>• EU excludes Chinese companies from government purchases &gt;€5M</a:t>
+            </a:r>
+          </a:p>
+          <a:p>
+            <a:pPr>
+              <a:defRPr sz="1400"/>
+            </a:pPr>
+            <a:r>
+              <a:t>• 50% maximum Chinese inputs for successful bids</a:t>
+            </a:r>
+          </a:p>
+          <a:p>
+            <a:pPr>
+              <a:defRPr sz="1400"/>
+            </a:pPr>
+            <a:r>
+              <a:t>• Exceptions where no alternative suppliers exist</a:t>
+            </a:r>
+          </a:p>
+          <a:p>
+            <a:pPr>
+              <a:defRPr sz="1400"/>
+            </a:pPr>
+            <a:r>
+              <a:t>• Reimbursement requires proving clinical value</a:t>
+            </a:r>
+          </a:p>
+          <a:p>
+            <a:pPr>
+              <a:defRPr sz="1400"/>
+            </a:pPr>
+            <a:r>
+              <a:t>• Public health insurance drives pricing systems</a:t>
+            </a:r>
+          </a:p>
+        </p:txBody>
+      </p:sp>
+      <p:sp>
+        <p:nvSpPr>
+          <p:cNvPr id="6" name="TextBox 5"/>
           <p:cNvSpPr txBox="1"/>
           <p:nvPr/>
         </p:nvSpPr>
@@ -5157,211 +6673,21 @@
             <a:spAutoFit/>
           </a:bodyPr>
           <a:lstStyle/>
+          <a:p/>
+          <a:p>
+            <a:pPr>
+              <a:defRPr sz="1000" b="1" i="1"/>
+            </a:pPr>
+            <a:r>
+              <a:t>References:</a:t>
+            </a:r>
+          </a:p>
           <a:p>
             <a:pPr>
               <a:defRPr sz="1000" i="1"/>
             </a:pPr>
             <a:r>
-              <a:t>References:</a:t>
-            </a:r>
-          </a:p>
-          <a:p>
-            <a:pPr>
-              <a:defRPr sz="900" i="1"/>
-            </a:pPr>
-            <a:r>
-              <a:t>[1] https://en.caclp.com/industry-news/2365.html</a:t>
-            </a:r>
-          </a:p>
-          <a:p>
-            <a:pPr>
-              <a:defRPr sz="900" i="1"/>
-            </a:pPr>
-            <a:r>
-              <a:t>[2] https://en.caclp.com/industry-news/2785.html</a:t>
-            </a:r>
-          </a:p>
-        </p:txBody>
-      </p:sp>
-    </p:spTree>
-  </p:cSld>
-  <p:clrMapOvr>
-    <a:masterClrMapping/>
-  </p:clrMapOvr>
-</p:sld>
-</file>
-
-<file path=ppt/slides/slide7.xml><?xml version="1.0" encoding="utf-8"?>
-<p:sld xmlns:a="http://schemas.openxmlformats.org/drawingml/2006/main" xmlns:p="http://schemas.openxmlformats.org/presentationml/2006/main" xmlns:r="http://schemas.openxmlformats.org/officeDocument/2006/relationships">
-  <p:cSld>
-    <p:spTree>
-      <p:nvGrpSpPr>
-        <p:cNvPr id="1" name=""/>
-        <p:cNvGrpSpPr/>
-        <p:nvPr/>
-      </p:nvGrpSpPr>
-      <p:grpSpPr/>
-      <p:sp>
-        <p:nvSpPr>
-          <p:cNvPr id="2" name="Title 1"/>
-          <p:cNvSpPr>
-            <a:spLocks noGrp="1"/>
-          </p:cNvSpPr>
-          <p:nvPr>
-            <p:ph type="title"/>
-          </p:nvPr>
-        </p:nvSpPr>
-        <p:spPr/>
-        <p:txBody>
-          <a:bodyPr/>
-          <a:lstStyle/>
-          <a:p>
-            <a:r>
-              <a:t>Regulatory Landscape</a:t>
-            </a:r>
-          </a:p>
-        </p:txBody>
-      </p:sp>
-      <p:sp>
-        <p:nvSpPr>
-          <p:cNvPr id="3" name="Content Placeholder 2"/>
-          <p:cNvSpPr>
-            <a:spLocks noGrp="1"/>
-          </p:cNvSpPr>
-          <p:nvPr>
-            <p:ph idx="1"/>
-          </p:nvPr>
-        </p:nvSpPr>
-        <p:spPr/>
-        <p:txBody>
-          <a:bodyPr/>
-          <a:lstStyle/>
-          <a:p/>
-          <a:p>
-            <a:pPr>
-              <a:defRPr sz="1600"/>
-            </a:pPr>
-            <a:r>
-              <a:t>IVDR (EU 2017/746) implementation began May 26, 2022 with extended transition to 2027-2028</a:t>
-            </a:r>
-          </a:p>
-          <a:p>
-            <a:pPr>
-              <a:defRPr sz="1600"/>
-            </a:pPr>
-            <a:r>
-              <a:t>CE certification mandatory for market access, acting as regulatory 'visa'</a:t>
-            </a:r>
-          </a:p>
-          <a:p>
-            <a:pPr>
-              <a:defRPr sz="1600"/>
-            </a:pPr>
-            <a:r>
-              <a:t>Chinese companies among first to achieve IVDR certifications across multiple categories</a:t>
-            </a:r>
-          </a:p>
-          <a:p>
-            <a:pPr>
-              <a:defRPr sz="1600"/>
-            </a:pPr>
-            <a:r>
-              <a:t>REACH environmental regulations adding compliance complexity for reagents and instruments</a:t>
-            </a:r>
-          </a:p>
-          <a:p>
-            <a:pPr>
-              <a:defRPr sz="1600"/>
-            </a:pPr>
-            <a:r>
-              <a:t>High-risk IVD products require Notified Body certification; low-risk can be self-declared</a:t>
-            </a:r>
-          </a:p>
-          <a:p>
-            <a:pPr>
-              <a:defRPr sz="1600"/>
-            </a:pPr>
-            <a:r>
-              <a:t>Average certification process lengthened by 6-12 months under IVDR</a:t>
-            </a:r>
-          </a:p>
-        </p:txBody>
-      </p:sp>
-      <p:pic>
-        <p:nvPicPr>
-          <p:cNvPr id="4" name="Picture 3" descr="image.png"/>
-          <p:cNvPicPr>
-            <a:picLocks noChangeAspect="1"/>
-          </p:cNvPicPr>
-          <p:nvPr/>
-        </p:nvPicPr>
-        <p:blipFill>
-          <a:blip r:embed="rId2"/>
-          <a:stretch>
-            <a:fillRect/>
-          </a:stretch>
-        </p:blipFill>
-        <p:spPr>
-          <a:xfrm>
-            <a:off x="914400" y="3200400"/>
-            <a:ext cx="7315200" cy="2743200"/>
-          </a:xfrm>
-          <a:prstGeom prst="rect">
-            <a:avLst/>
-          </a:prstGeom>
-        </p:spPr>
-      </p:pic>
-      <p:sp>
-        <p:nvSpPr>
-          <p:cNvPr id="5" name="TextBox 4"/>
-          <p:cNvSpPr txBox="1"/>
-          <p:nvPr/>
-        </p:nvSpPr>
-        <p:spPr>
-          <a:xfrm>
-            <a:off x="457200" y="5943600"/>
-            <a:ext cx="8229600" cy="914400"/>
-          </a:xfrm>
-          <a:prstGeom prst="rect">
-            <a:avLst/>
-          </a:prstGeom>
-          <a:noFill/>
-        </p:spPr>
-        <p:txBody>
-          <a:bodyPr wrap="none">
-            <a:spAutoFit/>
-          </a:bodyPr>
-          <a:lstStyle/>
-          <a:p>
-            <a:pPr>
-              <a:defRPr sz="1000" i="1"/>
-            </a:pPr>
-            <a:r>
-              <a:t>References:</a:t>
-            </a:r>
-          </a:p>
-          <a:p>
-            <a:pPr>
-              <a:defRPr sz="900" i="1"/>
-            </a:pPr>
-            <a:r>
-              <a:t>[1] https://drive.google.com/file/d/1zt3vNjOlugypsvPkywduyWNRPGTHrsoj/view?usp=drive_link</a:t>
-            </a:r>
-          </a:p>
-          <a:p>
-            <a:pPr>
-              <a:defRPr sz="900" i="1"/>
-            </a:pPr>
-            <a:r>
-              <a:t>[2] https://en.caclp.com/industry-news/1160.html</a:t>
-            </a:r>
-          </a:p>
-          <a:p>
-            <a:pPr>
-              <a:defRPr sz="900" i="1"/>
-            </a:pPr>
-            <a:r>
-              <a:t>[3] https://en.caclp.com/industry-news/3530.html</a:t>
+              <a:t>[2] https://ec.europa.eu/commission/presscorner/detail/en/ip_25_1569</a:t>
             </a:r>
           </a:p>
         </p:txBody>
@@ -5400,7 +6726,7 @@
           <a:lstStyle/>
           <a:p>
             <a:r>
-              <a:t>Access &amp; Reimbursement</a:t>
+              <a:t>Budget Environment &amp; Spending Analysis</a:t>
             </a:r>
           </a:p>
         </p:txBody>
@@ -5422,42 +6748,146 @@
           <a:p/>
           <a:p>
             <a:pPr>
-              <a:defRPr sz="1600"/>
-            </a:pPr>
-            <a:r>
-              <a:t>EU member states use pricing systems driven by public health insurance</a:t>
-            </a:r>
-          </a:p>
-          <a:p>
-            <a:pPr>
-              <a:defRPr sz="1600"/>
-            </a:pPr>
-            <a:r>
-              <a:t>National/regional agencies negotiate with manufacturers balancing affordability, profits, compliance</a:t>
-            </a:r>
-          </a:p>
-          <a:p>
-            <a:pPr>
-              <a:defRPr sz="1600"/>
-            </a:pPr>
-            <a:r>
-              <a:t>Tiered reimbursement structure: DRG-based prospective payment system plus supplementary mechanisms</a:t>
-            </a:r>
-          </a:p>
-          <a:p>
-            <a:pPr>
-              <a:defRPr sz="1600"/>
-            </a:pPr>
-            <a:r>
-              <a:t>Public tender rules and long-term cost control paramount in government-funded systems</a:t>
-            </a:r>
-          </a:p>
-          <a:p>
-            <a:pPr>
-              <a:defRPr sz="1600"/>
-            </a:pPr>
-            <a:r>
-              <a:t>European market fragmentation requires country-specific reimbursement strategies</a:t>
+              <a:defRPr sz="1600">
+                <a:latin typeface="Arial"/>
+              </a:defRPr>
+            </a:pPr>
+            <a:r>
+              <a:t>Healthcare Budget Structure:</a:t>
+            </a:r>
+          </a:p>
+          <a:p>
+            <a:pPr>
+              <a:defRPr sz="1600">
+                <a:latin typeface="Arial"/>
+              </a:defRPr>
+            </a:pPr>
+            <a:r>
+              <a:t>  • Government funding: Primary source</a:t>
+            </a:r>
+          </a:p>
+          <a:p>
+            <a:pPr>
+              <a:defRPr sz="1600">
+                <a:latin typeface="Arial"/>
+              </a:defRPr>
+            </a:pPr>
+            <a:r>
+              <a:t>  • Mandatory insurance: Significant contributor</a:t>
+            </a:r>
+          </a:p>
+          <a:p>
+            <a:pPr>
+              <a:defRPr sz="1600">
+                <a:latin typeface="Arial"/>
+              </a:defRPr>
+            </a:pPr>
+            <a:r>
+              <a:t>  • Private spending: Limited role</a:t>
+            </a:r>
+          </a:p>
+          <a:p>
+            <a:pPr>
+              <a:defRPr sz="1600">
+                <a:latin typeface="Arial"/>
+              </a:defRPr>
+            </a:pPr>
+          </a:p>
+          <a:p>
+            <a:pPr>
+              <a:defRPr sz="1600">
+                <a:latin typeface="Arial"/>
+              </a:defRPr>
+            </a:pPr>
+            <a:r>
+              <a:t>Budget Allocation Trends:</a:t>
+            </a:r>
+          </a:p>
+          <a:p>
+            <a:pPr>
+              <a:defRPr sz="1600">
+                <a:latin typeface="Arial"/>
+              </a:defRPr>
+            </a:pPr>
+            <a:r>
+              <a:t>  • Large-scale tenders: &gt;€5M (restricted)</a:t>
+            </a:r>
+          </a:p>
+          <a:p>
+            <a:pPr>
+              <a:defRPr sz="1600">
+                <a:latin typeface="Arial"/>
+              </a:defRPr>
+            </a:pPr>
+            <a:r>
+              <a:t>  • Smaller contracts: &lt;€5M (accessible)</a:t>
+            </a:r>
+          </a:p>
+          <a:p>
+            <a:pPr>
+              <a:defRPr sz="1600">
+                <a:latin typeface="Arial"/>
+              </a:defRPr>
+            </a:pPr>
+            <a:r>
+              <a:t>  • Centralized procurement: Major budget pools</a:t>
+            </a:r>
+          </a:p>
+          <a:p>
+            <a:pPr>
+              <a:defRPr sz="1600">
+                <a:latin typeface="Arial"/>
+              </a:defRPr>
+            </a:pPr>
+            <a:r>
+              <a:t>  • Decentralized purchasing: Smaller opportunities</a:t>
+            </a:r>
+          </a:p>
+          <a:p>
+            <a:pPr>
+              <a:defRPr sz="1600">
+                <a:latin typeface="Arial"/>
+              </a:defRPr>
+            </a:pPr>
+          </a:p>
+          <a:p>
+            <a:pPr>
+              <a:defRPr sz="1600">
+                <a:latin typeface="Arial"/>
+              </a:defRPr>
+            </a:pPr>
+            <a:r>
+              <a:t>Spending Priorities:</a:t>
+            </a:r>
+          </a:p>
+          <a:p>
+            <a:pPr>
+              <a:defRPr sz="1600">
+                <a:latin typeface="Arial"/>
+              </a:defRPr>
+            </a:pPr>
+            <a:r>
+              <a:t>  • Cost control: Primary focus</a:t>
+            </a:r>
+          </a:p>
+          <a:p>
+            <a:pPr>
+              <a:defRPr sz="1600">
+                <a:latin typeface="Arial"/>
+              </a:defRPr>
+            </a:pPr>
+            <a:r>
+              <a:t>  • Innovative technologies: Supplementary funding</a:t>
+            </a:r>
+          </a:p>
+          <a:p>
+            <a:pPr>
+              <a:defRPr sz="1600">
+                <a:latin typeface="Arial"/>
+              </a:defRPr>
+            </a:pPr>
+            <a:r>
+              <a:t>  • Long-term value: Key consideration</a:t>
             </a:r>
           </a:p>
         </p:txBody>
@@ -5483,20 +6913,29 @@
             <a:spAutoFit/>
           </a:bodyPr>
           <a:lstStyle/>
+          <a:p/>
+          <a:p>
+            <a:pPr>
+              <a:defRPr sz="1000" b="1" i="1"/>
+            </a:pPr>
+            <a:r>
+              <a:t>References:</a:t>
+            </a:r>
+          </a:p>
           <a:p>
             <a:pPr>
               <a:defRPr sz="1000" i="1"/>
             </a:pPr>
             <a:r>
-              <a:t>References:</a:t>
-            </a:r>
-          </a:p>
-          <a:p>
-            <a:pPr>
-              <a:defRPr sz="900" i="1"/>
-            </a:pPr>
-            <a:r>
               <a:t>[1] https://drive.google.com/file/d/1zt3vNjOlugypsvPkywduyWNRPGTHrsoj/view?usp=drive_link</a:t>
+            </a:r>
+          </a:p>
+          <a:p>
+            <a:pPr>
+              <a:defRPr sz="1000" i="1"/>
+            </a:pPr>
+            <a:r>
+              <a:t>[2] https://ec.europa.eu/commission/presscorner/detail/en/ip_25_1569</a:t>
             </a:r>
           </a:p>
         </p:txBody>
@@ -5535,7 +6974,7 @@
           <a:lstStyle/>
           <a:p>
             <a:r>
-              <a:t>Budget &amp; Spend Analysis</a:t>
+              <a:t>Customer Receptivity &amp; Adoption Trends</a:t>
             </a:r>
           </a:p>
         </p:txBody>
@@ -5555,51 +6994,551 @@
           <a:bodyPr/>
           <a:lstStyle/>
           <a:p/>
-          <a:p>
-            <a:pPr>
-              <a:defRPr sz="1600"/>
-            </a:pPr>
-            <a:r>
-              <a:t>€5M threshold for EU restrictions on Chinese participation in public procurement</a:t>
-            </a:r>
-          </a:p>
-          <a:p>
-            <a:pPr>
-              <a:defRPr sz="1600"/>
-            </a:pPr>
-            <a:r>
-              <a:t>Chinese suppliers limited to smaller, decentralized budget allocations</a:t>
-            </a:r>
-          </a:p>
-          <a:p>
-            <a:pPr>
-              <a:defRPr sz="1600"/>
-            </a:pPr>
-            <a:r>
-              <a:t>Successful bids must contain no more than 50% Chinese inputs</a:t>
-            </a:r>
-          </a:p>
-          <a:p>
-            <a:pPr>
-              <a:defRPr sz="1600"/>
-            </a:pPr>
-            <a:r>
-              <a:t>Exceptions possible where no alternative suppliers exist</a:t>
-            </a:r>
-          </a:p>
-          <a:p>
-            <a:pPr>
-              <a:defRPr sz="1600"/>
-            </a:pPr>
-            <a:r>
-              <a:t>Government and mandatory insurance represents majority of funding (&gt;60%)</a:t>
-            </a:r>
-          </a:p>
-        </p:txBody>
-      </p:sp>
-      <p:sp>
-        <p:nvSpPr>
-          <p:cNvPr id="4" name="TextBox 3"/>
+        </p:txBody>
+      </p:sp>
+      <p:graphicFrame>
+        <p:nvGraphicFramePr>
+          <p:cNvPr id="4" name="Table 3"/>
+          <p:cNvGraphicFramePr>
+            <a:graphicFrameLocks noGrp="1"/>
+          </p:cNvGraphicFramePr>
+          <p:nvPr/>
+        </p:nvGraphicFramePr>
+        <p:xfrm>
+          <a:off x="457200" y="1828800"/>
+          <a:ext cx="8229600" cy="2743200"/>
+        </p:xfrm>
+        <a:graphic>
+          <a:graphicData uri="http://schemas.openxmlformats.org/drawingml/2006/table">
+            <a:tbl>
+              <a:tblPr firstRow="1" bandRow="1">
+                <a:tableStyleId>{5C22544A-7EE6-4342-B048-85BDC9FD1C3A}</a:tableStyleId>
+              </a:tblPr>
+              <a:tblGrid>
+                <a:gridCol w="2057400"/>
+                <a:gridCol w="2057400"/>
+                <a:gridCol w="2057400"/>
+                <a:gridCol w="2057400"/>
+              </a:tblGrid>
+              <a:tr h="457200">
+                <a:tc>
+                  <a:txBody>
+                    <a:bodyPr/>
+                    <a:lstStyle/>
+                    <a:p>
+                      <a:pPr>
+                        <a:defRPr sz="1200" b="1">
+                          <a:solidFill>
+                            <a:srgbClr val="FFFFFF"/>
+                          </a:solidFill>
+                          <a:latin typeface="Arial"/>
+                        </a:defRPr>
+                      </a:pPr>
+                      <a:r>
+                        <a:t>Segment</a:t>
+                      </a:r>
+                    </a:p>
+                  </a:txBody>
+                  <a:tcPr>
+                    <a:solidFill>
+                      <a:srgbClr val="2E75B6"/>
+                    </a:solidFill>
+                  </a:tcPr>
+                </a:tc>
+                <a:tc>
+                  <a:txBody>
+                    <a:bodyPr/>
+                    <a:lstStyle/>
+                    <a:p>
+                      <a:pPr>
+                        <a:defRPr sz="1200" b="1">
+                          <a:solidFill>
+                            <a:srgbClr val="FFFFFF"/>
+                          </a:solidFill>
+                          <a:latin typeface="Arial"/>
+                        </a:defRPr>
+                      </a:pPr>
+                      <a:r>
+                        <a:t>Receptivity</a:t>
+                      </a:r>
+                    </a:p>
+                  </a:txBody>
+                  <a:tcPr>
+                    <a:solidFill>
+                      <a:srgbClr val="2E75B6"/>
+                    </a:solidFill>
+                  </a:tcPr>
+                </a:tc>
+                <a:tc>
+                  <a:txBody>
+                    <a:bodyPr/>
+                    <a:lstStyle/>
+                    <a:p>
+                      <a:pPr>
+                        <a:defRPr sz="1200" b="1">
+                          <a:solidFill>
+                            <a:srgbClr val="FFFFFF"/>
+                          </a:solidFill>
+                          <a:latin typeface="Arial"/>
+                        </a:defRPr>
+                      </a:pPr>
+                      <a:r>
+                        <a:t>Key Factors</a:t>
+                      </a:r>
+                    </a:p>
+                  </a:txBody>
+                  <a:tcPr>
+                    <a:solidFill>
+                      <a:srgbClr val="2E75B6"/>
+                    </a:solidFill>
+                  </a:tcPr>
+                </a:tc>
+                <a:tc>
+                  <a:txBody>
+                    <a:bodyPr/>
+                    <a:lstStyle/>
+                    <a:p>
+                      <a:pPr>
+                        <a:defRPr sz="1200" b="1">
+                          <a:solidFill>
+                            <a:srgbClr val="FFFFFF"/>
+                          </a:solidFill>
+                          <a:latin typeface="Arial"/>
+                        </a:defRPr>
+                      </a:pPr>
+                      <a:r>
+                        <a:t>Chinese Position</a:t>
+                      </a:r>
+                    </a:p>
+                  </a:txBody>
+                  <a:tcPr>
+                    <a:solidFill>
+                      <a:srgbClr val="2E75B6"/>
+                    </a:solidFill>
+                  </a:tcPr>
+                </a:tc>
+              </a:tr>
+              <a:tr h="457200">
+                <a:tc>
+                  <a:txBody>
+                    <a:bodyPr/>
+                    <a:lstStyle/>
+                    <a:p>
+                      <a:pPr>
+                        <a:defRPr sz="1200">
+                          <a:latin typeface="Arial"/>
+                        </a:defRPr>
+                      </a:pPr>
+                      <a:r>
+                        <a:t>High-End</a:t>
+                      </a:r>
+                    </a:p>
+                  </a:txBody>
+                  <a:tcPr/>
+                </a:tc>
+                <a:tc>
+                  <a:txBody>
+                    <a:bodyPr/>
+                    <a:lstStyle/>
+                    <a:p>
+                      <a:pPr>
+                        <a:defRPr sz="1200">
+                          <a:latin typeface="Arial"/>
+                        </a:defRPr>
+                      </a:pPr>
+                      <a:r>
+                        <a:t>Low</a:t>
+                      </a:r>
+                    </a:p>
+                  </a:txBody>
+                  <a:tcPr/>
+                </a:tc>
+                <a:tc>
+                  <a:txBody>
+                    <a:bodyPr/>
+                    <a:lstStyle/>
+                    <a:p>
+                      <a:pPr>
+                        <a:defRPr sz="1200">
+                          <a:latin typeface="Arial"/>
+                        </a:defRPr>
+                      </a:pPr>
+                      <a:r>
+                        <a:t>Brand Trust, Technology</a:t>
+                      </a:r>
+                    </a:p>
+                  </a:txBody>
+                  <a:tcPr/>
+                </a:tc>
+                <a:tc>
+                  <a:txBody>
+                    <a:bodyPr/>
+                    <a:lstStyle/>
+                    <a:p>
+                      <a:pPr>
+                        <a:defRPr sz="1200">
+                          <a:latin typeface="Arial"/>
+                        </a:defRPr>
+                      </a:pPr>
+                      <a:r>
+                        <a:t>Challenged</a:t>
+                      </a:r>
+                    </a:p>
+                  </a:txBody>
+                  <a:tcPr/>
+                </a:tc>
+              </a:tr>
+              <a:tr h="457200">
+                <a:tc>
+                  <a:txBody>
+                    <a:bodyPr/>
+                    <a:lstStyle/>
+                    <a:p>
+                      <a:pPr>
+                        <a:defRPr sz="1200">
+                          <a:latin typeface="Arial"/>
+                        </a:defRPr>
+                      </a:pPr>
+                      <a:r>
+                        <a:t>Mid-Tier</a:t>
+                      </a:r>
+                    </a:p>
+                  </a:txBody>
+                  <a:tcPr/>
+                </a:tc>
+                <a:tc>
+                  <a:txBody>
+                    <a:bodyPr/>
+                    <a:lstStyle/>
+                    <a:p>
+                      <a:pPr>
+                        <a:defRPr sz="1200">
+                          <a:latin typeface="Arial"/>
+                        </a:defRPr>
+                      </a:pPr>
+                      <a:r>
+                        <a:t>Moderate</a:t>
+                      </a:r>
+                    </a:p>
+                  </a:txBody>
+                  <a:tcPr/>
+                </a:tc>
+                <a:tc>
+                  <a:txBody>
+                    <a:bodyPr/>
+                    <a:lstStyle/>
+                    <a:p>
+                      <a:pPr>
+                        <a:defRPr sz="1200">
+                          <a:latin typeface="Arial"/>
+                        </a:defRPr>
+                      </a:pPr>
+                      <a:r>
+                        <a:t>Price, Performance</a:t>
+                      </a:r>
+                    </a:p>
+                  </a:txBody>
+                  <a:tcPr/>
+                </a:tc>
+                <a:tc>
+                  <a:txBody>
+                    <a:bodyPr/>
+                    <a:lstStyle/>
+                    <a:p>
+                      <a:pPr>
+                        <a:defRPr sz="1200">
+                          <a:latin typeface="Arial"/>
+                        </a:defRPr>
+                      </a:pPr>
+                      <a:r>
+                        <a:t>Competitive</a:t>
+                      </a:r>
+                    </a:p>
+                  </a:txBody>
+                  <a:tcPr/>
+                </a:tc>
+              </a:tr>
+              <a:tr h="457200">
+                <a:tc>
+                  <a:txBody>
+                    <a:bodyPr/>
+                    <a:lstStyle/>
+                    <a:p>
+                      <a:pPr>
+                        <a:defRPr sz="1200">
+                          <a:latin typeface="Arial"/>
+                        </a:defRPr>
+                      </a:pPr>
+                      <a:r>
+                        <a:t>Low-End</a:t>
+                      </a:r>
+                    </a:p>
+                  </a:txBody>
+                  <a:tcPr/>
+                </a:tc>
+                <a:tc>
+                  <a:txBody>
+                    <a:bodyPr/>
+                    <a:lstStyle/>
+                    <a:p>
+                      <a:pPr>
+                        <a:defRPr sz="1200">
+                          <a:latin typeface="Arial"/>
+                        </a:defRPr>
+                      </a:pPr>
+                      <a:r>
+                        <a:t>High</a:t>
+                      </a:r>
+                    </a:p>
+                  </a:txBody>
+                  <a:tcPr/>
+                </a:tc>
+                <a:tc>
+                  <a:txBody>
+                    <a:bodyPr/>
+                    <a:lstStyle/>
+                    <a:p>
+                      <a:pPr>
+                        <a:defRPr sz="1200">
+                          <a:latin typeface="Arial"/>
+                        </a:defRPr>
+                      </a:pPr>
+                      <a:r>
+                        <a:t>Cost-Effectiveness</a:t>
+                      </a:r>
+                    </a:p>
+                  </a:txBody>
+                  <a:tcPr/>
+                </a:tc>
+                <a:tc>
+                  <a:txBody>
+                    <a:bodyPr/>
+                    <a:lstStyle/>
+                    <a:p>
+                      <a:pPr>
+                        <a:defRPr sz="1200">
+                          <a:latin typeface="Arial"/>
+                        </a:defRPr>
+                      </a:pPr>
+                      <a:r>
+                        <a:t>Strong</a:t>
+                      </a:r>
+                    </a:p>
+                  </a:txBody>
+                  <a:tcPr/>
+                </a:tc>
+              </a:tr>
+              <a:tr h="457200">
+                <a:tc>
+                  <a:txBody>
+                    <a:bodyPr/>
+                    <a:lstStyle/>
+                    <a:p>
+                      <a:pPr>
+                        <a:defRPr sz="1200">
+                          <a:latin typeface="Arial"/>
+                        </a:defRPr>
+                      </a:pPr>
+                      <a:r>
+                        <a:t>POCT</a:t>
+                      </a:r>
+                    </a:p>
+                  </a:txBody>
+                  <a:tcPr/>
+                </a:tc>
+                <a:tc>
+                  <a:txBody>
+                    <a:bodyPr/>
+                    <a:lstStyle/>
+                    <a:p>
+                      <a:pPr>
+                        <a:defRPr sz="1200">
+                          <a:latin typeface="Arial"/>
+                        </a:defRPr>
+                      </a:pPr>
+                      <a:r>
+                        <a:t>Growing</a:t>
+                      </a:r>
+                    </a:p>
+                  </a:txBody>
+                  <a:tcPr/>
+                </a:tc>
+                <a:tc>
+                  <a:txBody>
+                    <a:bodyPr/>
+                    <a:lstStyle/>
+                    <a:p>
+                      <a:pPr>
+                        <a:defRPr sz="1200">
+                          <a:latin typeface="Arial"/>
+                        </a:defRPr>
+                      </a:pPr>
+                      <a:r>
+                        <a:t>Convenience, Speed</a:t>
+                      </a:r>
+                    </a:p>
+                  </a:txBody>
+                  <a:tcPr/>
+                </a:tc>
+                <a:tc>
+                  <a:txBody>
+                    <a:bodyPr/>
+                    <a:lstStyle/>
+                    <a:p>
+                      <a:pPr>
+                        <a:defRPr sz="1200">
+                          <a:latin typeface="Arial"/>
+                        </a:defRPr>
+                      </a:pPr>
+                      <a:r>
+                        <a:t>Emerging</a:t>
+                      </a:r>
+                    </a:p>
+                  </a:txBody>
+                  <a:tcPr/>
+                </a:tc>
+              </a:tr>
+              <a:tr h="457200">
+                <a:tc>
+                  <a:txBody>
+                    <a:bodyPr/>
+                    <a:lstStyle/>
+                    <a:p>
+                      <a:pPr>
+                        <a:defRPr sz="1200">
+                          <a:latin typeface="Arial"/>
+                        </a:defRPr>
+                      </a:pPr>
+                      <a:r>
+                        <a:t>Emerging Tech</a:t>
+                      </a:r>
+                    </a:p>
+                  </a:txBody>
+                  <a:tcPr/>
+                </a:tc>
+                <a:tc>
+                  <a:txBody>
+                    <a:bodyPr/>
+                    <a:lstStyle/>
+                    <a:p>
+                      <a:pPr>
+                        <a:defRPr sz="1200">
+                          <a:latin typeface="Arial"/>
+                        </a:defRPr>
+                      </a:pPr>
+                      <a:r>
+                        <a:t>Selective</a:t>
+                      </a:r>
+                    </a:p>
+                  </a:txBody>
+                  <a:tcPr/>
+                </a:tc>
+                <a:tc>
+                  <a:txBody>
+                    <a:bodyPr/>
+                    <a:lstStyle/>
+                    <a:p>
+                      <a:pPr>
+                        <a:defRPr sz="1200">
+                          <a:latin typeface="Arial"/>
+                        </a:defRPr>
+                      </a:pPr>
+                      <a:r>
+                        <a:t>Innovation, Evidence</a:t>
+                      </a:r>
+                    </a:p>
+                  </a:txBody>
+                  <a:tcPr/>
+                </a:tc>
+                <a:tc>
+                  <a:txBody>
+                    <a:bodyPr/>
+                    <a:lstStyle/>
+                    <a:p>
+                      <a:pPr>
+                        <a:defRPr sz="1200">
+                          <a:latin typeface="Arial"/>
+                        </a:defRPr>
+                      </a:pPr>
+                      <a:r>
+                        <a:t>Developing</a:t>
+                      </a:r>
+                    </a:p>
+                  </a:txBody>
+                  <a:tcPr/>
+                </a:tc>
+              </a:tr>
+            </a:tbl>
+          </a:graphicData>
+        </a:graphic>
+      </p:graphicFrame>
+      <p:sp>
+        <p:nvSpPr>
+          <p:cNvPr id="5" name="TextBox 4"/>
+          <p:cNvSpPr txBox="1"/>
+          <p:nvPr/>
+        </p:nvSpPr>
+        <p:spPr>
+          <a:xfrm>
+            <a:off x="457200" y="4572000"/>
+            <a:ext cx="8229600" cy="1371600"/>
+          </a:xfrm>
+          <a:prstGeom prst="rect">
+            <a:avLst/>
+          </a:prstGeom>
+          <a:noFill/>
+        </p:spPr>
+        <p:txBody>
+          <a:bodyPr wrap="none">
+            <a:spAutoFit/>
+          </a:bodyPr>
+          <a:lstStyle/>
+          <a:p/>
+          <a:p>
+            <a:pPr>
+              <a:defRPr sz="1400"/>
+            </a:pPr>
+            <a:r>
+              <a:t>• Chinese exports to EU doubled 2015-2023 indicating historical adoption</a:t>
+            </a:r>
+          </a:p>
+          <a:p>
+            <a:pPr>
+              <a:defRPr sz="1400"/>
+            </a:pPr>
+            <a:r>
+              <a:t>• Strong price competitiveness in low-to-mid tier segments</a:t>
+            </a:r>
+          </a:p>
+          <a:p>
+            <a:pPr>
+              <a:defRPr sz="1400"/>
+            </a:pPr>
+            <a:r>
+              <a:t>• Trust deficit in high-end products versus Western incumbents</a:t>
+            </a:r>
+          </a:p>
+          <a:p>
+            <a:pPr>
+              <a:defRPr sz="1400"/>
+            </a:pPr>
+            <a:r>
+              <a:t>• Snibe sold 3,637 units abroad vs 1,141 domestic (2022)</a:t>
+            </a:r>
+          </a:p>
+          <a:p>
+            <a:pPr>
+              <a:defRPr sz="1400"/>
+            </a:pPr>
+            <a:r>
+              <a:t>• Local service capabilities critical for customer satisfaction</a:t>
+            </a:r>
+          </a:p>
+        </p:txBody>
+      </p:sp>
+      <p:sp>
+        <p:nvSpPr>
+          <p:cNvPr id="6" name="TextBox 5"/>
           <p:cNvSpPr txBox="1"/>
           <p:nvPr/>
         </p:nvSpPr>
@@ -5618,28 +7557,29 @@
             <a:spAutoFit/>
           </a:bodyPr>
           <a:lstStyle/>
+          <a:p/>
+          <a:p>
+            <a:pPr>
+              <a:defRPr sz="1000" b="1" i="1"/>
+            </a:pPr>
+            <a:r>
+              <a:t>References:</a:t>
+            </a:r>
+          </a:p>
           <a:p>
             <a:pPr>
               <a:defRPr sz="1000" i="1"/>
             </a:pPr>
             <a:r>
-              <a:t>References:</a:t>
-            </a:r>
-          </a:p>
-          <a:p>
-            <a:pPr>
-              <a:defRPr sz="900" i="1"/>
-            </a:pPr>
-            <a:r>
-              <a:t>[1] https://ec.europa.eu/commission/presscorner/detail/en/ip_25_1569</a:t>
-            </a:r>
-          </a:p>
-          <a:p>
-            <a:pPr>
-              <a:defRPr sz="900" i="1"/>
-            </a:pPr>
-            <a:r>
-              <a:t>[2] https://drive.google.com/file/d/1zt3vNjOlugypsvPkywduyWNRPGTHrsoj/view?usp=drive_link</a:t>
+              <a:t>[1] https://drive.google.com/file/d/1zt3vNjOlugypsvPkywduyWNRPGTHrsoj/view?usp=drive_link</a:t>
+            </a:r>
+          </a:p>
+          <a:p>
+            <a:pPr>
+              <a:defRPr sz="1000" i="1"/>
+            </a:pPr>
+            <a:r>
+              <a:t>[4] https://en.caclp.com/industry-news/2365.html</a:t>
             </a:r>
           </a:p>
         </p:txBody>
